--- a/reports/Presentation.pptx
+++ b/reports/Presentation.pptx
@@ -5,41 +5,42 @@
     <p:sldMasterId id="2147483648" r:id="rId1"/>
   </p:sldMasterIdLst>
   <p:notesMasterIdLst>
-    <p:notesMasterId r:id="rId12"/>
+    <p:notesMasterId r:id="rId13"/>
   </p:notesMasterIdLst>
   <p:sldIdLst>
     <p:sldId id="256" r:id="rId2"/>
     <p:sldId id="257" r:id="rId3"/>
-    <p:sldId id="258" r:id="rId4"/>
-    <p:sldId id="259" r:id="rId5"/>
-    <p:sldId id="260" r:id="rId6"/>
-    <p:sldId id="261" r:id="rId7"/>
-    <p:sldId id="262" r:id="rId8"/>
-    <p:sldId id="263" r:id="rId9"/>
-    <p:sldId id="264" r:id="rId10"/>
-    <p:sldId id="265" r:id="rId11"/>
+    <p:sldId id="266" r:id="rId4"/>
+    <p:sldId id="267" r:id="rId5"/>
+    <p:sldId id="259" r:id="rId6"/>
+    <p:sldId id="260" r:id="rId7"/>
+    <p:sldId id="261" r:id="rId8"/>
+    <p:sldId id="262" r:id="rId9"/>
+    <p:sldId id="263" r:id="rId10"/>
+    <p:sldId id="264" r:id="rId11"/>
+    <p:sldId id="265" r:id="rId12"/>
   </p:sldIdLst>
   <p:sldSz cx="9144000" cy="5143500" type="screen16x9"/>
   <p:notesSz cx="5143500" cy="9144000"/>
   <p:embeddedFontLst>
     <p:embeddedFont>
+      <p:font typeface="Source Serif 4 Bold" panose="020B0604020202020204" charset="0"/>
+      <p:regular r:id="rId14"/>
+    </p:embeddedFont>
+    <p:embeddedFont>
       <p:font typeface="Platypi Medium" panose="020B0604020202020204" charset="0"/>
-      <p:regular r:id="rId13"/>
+      <p:regular r:id="rId15"/>
     </p:embeddedFont>
     <p:embeddedFont>
       <p:font typeface="Source Serif 4" panose="020B0604020202020204" charset="0"/>
-      <p:regular r:id="rId14"/>
+      <p:regular r:id="rId16"/>
     </p:embeddedFont>
     <p:embeddedFont>
       <p:font typeface="Calibri" panose="020F0502020204030204" pitchFamily="34" charset="0"/>
-      <p:regular r:id="rId15"/>
-      <p:bold r:id="rId16"/>
-      <p:italic r:id="rId17"/>
-      <p:boldItalic r:id="rId18"/>
-    </p:embeddedFont>
-    <p:embeddedFont>
-      <p:font typeface="Source Serif 4 Bold" panose="020B0604020202020204" charset="0"/>
-      <p:regular r:id="rId19"/>
+      <p:regular r:id="rId17"/>
+      <p:bold r:id="rId18"/>
+      <p:italic r:id="rId19"/>
+      <p:boldItalic r:id="rId20"/>
     </p:embeddedFont>
   </p:embeddedFontLst>
   <p:defaultTextStyle>
@@ -134,6 +135,22 @@
       </a:defRPr>
     </a:lvl9pPr>
   </p:defaultTextStyle>
+  <p:extLst>
+    <p:ext uri="{EFAFB233-063F-42B5-8137-9DF3F51BA10A}">
+      <p15:sldGuideLst xmlns:p15="http://schemas.microsoft.com/office/powerpoint/2012/main" xmlns="">
+        <p15:guide id="1" orient="horz" pos="1620">
+          <p15:clr>
+            <a:srgbClr val="A4A3A4"/>
+          </p15:clr>
+        </p15:guide>
+        <p15:guide id="2" pos="2880">
+          <p15:clr>
+            <a:srgbClr val="A4A3A4"/>
+          </p15:clr>
+        </p15:guide>
+      </p15:sldGuideLst>
+    </p:ext>
+  </p:extLst>
 </p:presentation>
 </file>
 
@@ -283,38 +300,37 @@
           <a:p>
             <a:pPr lvl="0"/>
             <a:r>
-              <a:rPr lang="en-US" smtClean="0"/>
+              <a:rPr lang="en-US"/>
               <a:t>Click to edit Master text styles</a:t>
             </a:r>
           </a:p>
           <a:p>
             <a:pPr lvl="1"/>
             <a:r>
-              <a:rPr lang="en-US" smtClean="0"/>
+              <a:rPr lang="en-US"/>
               <a:t>Second level</a:t>
             </a:r>
           </a:p>
           <a:p>
             <a:pPr lvl="2"/>
             <a:r>
-              <a:rPr lang="en-US" smtClean="0"/>
+              <a:rPr lang="en-US"/>
               <a:t>Third level</a:t>
             </a:r>
           </a:p>
           <a:p>
             <a:pPr lvl="3"/>
             <a:r>
-              <a:rPr lang="en-US" smtClean="0"/>
+              <a:rPr lang="en-US"/>
               <a:t>Fourth level</a:t>
             </a:r>
           </a:p>
           <a:p>
             <a:pPr lvl="4"/>
             <a:r>
-              <a:rPr lang="en-US" smtClean="0"/>
+              <a:rPr lang="en-US"/>
               <a:t>Fifth level</a:t>
             </a:r>
-            <a:endParaRPr lang="en-US"/>
           </a:p>
         </p:txBody>
       </p:sp>
@@ -637,6 +653,90 @@
             <a:fld id="{F7021451-1387-4CA6-816F-3879F97B5CBC}" type="slidenum">
               <a:rPr lang="en-US"/>
               <a:t>10</a:t>
+            </a:fld>
+            <a:endParaRPr lang="en-US"/>
+          </a:p>
+        </p:txBody>
+      </p:sp>
+    </p:spTree>
+    <p:extLst>
+      <p:ext uri="{BB962C8B-B14F-4D97-AF65-F5344CB8AC3E}">
+        <p14:creationId xmlns:p14="http://schemas.microsoft.com/office/powerpoint/2010/main" val="1024086991"/>
+      </p:ext>
+    </p:extLst>
+  </p:cSld>
+  <p:clrMapOvr>
+    <a:masterClrMapping/>
+  </p:clrMapOvr>
+</p:notes>
+</file>
+
+<file path=ppt/notesSlides/notesSlide11.xml><?xml version="1.0" encoding="utf-8"?>
+<p:notes xmlns:a="http://schemas.openxmlformats.org/drawingml/2006/main" xmlns:r="http://schemas.openxmlformats.org/officeDocument/2006/relationships" xmlns:p="http://schemas.openxmlformats.org/presentationml/2006/main">
+  <p:cSld>
+    <p:spTree>
+      <p:nvGrpSpPr>
+        <p:cNvPr id="1" name=""/>
+        <p:cNvGrpSpPr/>
+        <p:nvPr/>
+      </p:nvGrpSpPr>
+      <p:grpSpPr>
+        <a:xfrm>
+          <a:off x="0" y="0"/>
+          <a:ext cx="0" cy="0"/>
+          <a:chOff x="0" y="0"/>
+          <a:chExt cx="0" cy="0"/>
+        </a:xfrm>
+      </p:grpSpPr>
+      <p:sp>
+        <p:nvSpPr>
+          <p:cNvPr id="2" name="Slide Image Placeholder 1"/>
+          <p:cNvSpPr>
+            <a:spLocks noGrp="1" noRot="1" noChangeAspect="1"/>
+          </p:cNvSpPr>
+          <p:nvPr>
+            <p:ph type="sldImg"/>
+          </p:nvPr>
+        </p:nvSpPr>
+        <p:spPr/>
+      </p:sp>
+      <p:sp>
+        <p:nvSpPr>
+          <p:cNvPr id="3" name="Notes Placeholder 2"/>
+          <p:cNvSpPr>
+            <a:spLocks noGrp="1"/>
+          </p:cNvSpPr>
+          <p:nvPr>
+            <p:ph type="body" idx="1"/>
+          </p:nvPr>
+        </p:nvSpPr>
+        <p:spPr/>
+        <p:txBody>
+          <a:bodyPr/>
+          <a:lstStyle/>
+          <a:p>
+            <a:endParaRPr lang="en-US" dirty="0"/>
+          </a:p>
+        </p:txBody>
+      </p:sp>
+      <p:sp>
+        <p:nvSpPr>
+          <p:cNvPr id="4" name="Slide Number Placeholder 3"/>
+          <p:cNvSpPr>
+            <a:spLocks noGrp="1"/>
+          </p:cNvSpPr>
+          <p:nvPr>
+            <p:ph type="sldNum" sz="quarter" idx="10"/>
+          </p:nvPr>
+        </p:nvSpPr>
+        <p:spPr/>
+        <p:txBody>
+          <a:bodyPr/>
+          <a:lstStyle/>
+          <a:p>
+            <a:fld id="{F7021451-1387-4CA6-816F-3879F97B5CBC}" type="slidenum">
+              <a:rPr lang="en-US"/>
+              <a:t>11</a:t>
             </a:fld>
             <a:endParaRPr lang="en-US"/>
           </a:p>
@@ -1763,7 +1863,7 @@
               <a:buNone/>
             </a:pPr>
             <a:r>
-              <a:rPr lang="fa-IR" altLang="en-US" sz="1100" dirty="0">
+              <a:rPr lang="fa-IR" altLang="en-US" sz="1100" dirty="0" smtClean="0">
                 <a:solidFill>
                   <a:srgbClr val="504C49"/>
                 </a:solidFill>
@@ -1771,7 +1871,18 @@
                 <a:ea typeface="Source Serif 4" pitchFamily="34" charset="-122"/>
                 <a:cs typeface="Source Serif 4" pitchFamily="34" charset="-120"/>
               </a:rPr>
-              <a:t>درس: شبیه‌ سازی کامپیوتری | ارائه‌ دهندگان: کسری فولادی، امید طالب‌ پور | بهار ۱۴۰۵</a:t>
+              <a:t>ارائه‌ </a:t>
+            </a:r>
+            <a:r>
+              <a:rPr lang="fa-IR" altLang="en-US" sz="1100" dirty="0">
+                <a:solidFill>
+                  <a:srgbClr val="504C49"/>
+                </a:solidFill>
+                <a:latin typeface="Source Serif 4" pitchFamily="34" charset="0"/>
+                <a:ea typeface="Source Serif 4" pitchFamily="34" charset="-122"/>
+                <a:cs typeface="Source Serif 4" pitchFamily="34" charset="-120"/>
+              </a:rPr>
+              <a:t>دهندگان: کسری فولادی، امید طالب‌ پور | بهار ۱۴۰۵</a:t>
             </a:r>
             <a:endParaRPr lang="fa-IR" sz="1100" dirty="0"/>
           </a:p>
@@ -1786,6 +1897,137 @@
 </file>
 
 <file path=ppt/slides/slide10.xml><?xml version="1.0" encoding="utf-8"?>
+<p:sld xmlns:a="http://schemas.openxmlformats.org/drawingml/2006/main" xmlns:r="http://schemas.openxmlformats.org/officeDocument/2006/relationships" xmlns:p="http://schemas.openxmlformats.org/presentationml/2006/main">
+  <p:cSld name="Slide 9">
+    <p:spTree>
+      <p:nvGrpSpPr>
+        <p:cNvPr id="1" name=""/>
+        <p:cNvGrpSpPr/>
+        <p:nvPr/>
+      </p:nvGrpSpPr>
+      <p:grpSpPr>
+        <a:xfrm>
+          <a:off x="0" y="0"/>
+          <a:ext cx="0" cy="0"/>
+          <a:chOff x="0" y="0"/>
+          <a:chExt cx="0" cy="0"/>
+        </a:xfrm>
+      </p:grpSpPr>
+      <p:sp>
+        <p:nvSpPr>
+          <p:cNvPr id="2" name="Text 0"/>
+          <p:cNvSpPr/>
+          <p:nvPr/>
+        </p:nvSpPr>
+        <p:spPr>
+          <a:xfrm>
+            <a:off x="496119" y="1868239"/>
+            <a:ext cx="8151763" cy="442987"/>
+          </a:xfrm>
+          <a:prstGeom prst="rect">
+            <a:avLst/>
+          </a:prstGeom>
+          <a:noFill/>
+          <a:ln/>
+        </p:spPr>
+        <p:txBody>
+          <a:bodyPr wrap="none" lIns="0" tIns="0" rIns="0" bIns="0" rtlCol="0" anchor="t"/>
+          <a:lstStyle/>
+          <a:p>
+            <a:pPr marL="0" indent="0" algn="r" rtl="1">
+              <a:lnSpc>
+                <a:spcPct val="104000"/>
+              </a:lnSpc>
+              <a:buNone/>
+            </a:pPr>
+            <a:r>
+              <a:rPr lang="fa-IR" altLang="en-US" sz="2750" dirty="0">
+                <a:solidFill>
+                  <a:srgbClr val="201B18"/>
+                </a:solidFill>
+                <a:latin typeface="Platypi Medium" pitchFamily="34" charset="0"/>
+                <a:ea typeface="Platypi Medium" pitchFamily="34" charset="-122"/>
+                <a:cs typeface="Platypi Medium" pitchFamily="34" charset="-120"/>
+              </a:rPr>
+              <a:t>نتیجه‌ گیری نهایی</a:t>
+            </a:r>
+            <a:endParaRPr lang="fa-IR" sz="2750" dirty="0"/>
+          </a:p>
+        </p:txBody>
+      </p:sp>
+      <p:sp>
+        <p:nvSpPr>
+          <p:cNvPr id="3" name="Text 1"/>
+          <p:cNvSpPr/>
+          <p:nvPr/>
+        </p:nvSpPr>
+        <p:spPr>
+          <a:xfrm>
+            <a:off x="496119" y="2594744"/>
+            <a:ext cx="8151763" cy="680442"/>
+          </a:xfrm>
+          <a:prstGeom prst="rect">
+            <a:avLst/>
+          </a:prstGeom>
+          <a:noFill/>
+          <a:ln/>
+        </p:spPr>
+        <p:txBody>
+          <a:bodyPr wrap="square" lIns="0" tIns="0" rIns="0" bIns="0" rtlCol="0" anchor="t">
+            <a:normAutofit/>
+          </a:bodyPr>
+          <a:lstStyle/>
+          <a:p>
+            <a:pPr marL="0" indent="0" algn="r" rtl="1">
+              <a:lnSpc>
+                <a:spcPct val="133000"/>
+              </a:lnSpc>
+              <a:buNone/>
+            </a:pPr>
+            <a:r>
+              <a:rPr lang="fa-IR" altLang="en-US" sz="1100" dirty="0">
+                <a:solidFill>
+                  <a:srgbClr val="504C49"/>
+                </a:solidFill>
+                <a:latin typeface="Source Serif 4" pitchFamily="34" charset="0"/>
+                <a:ea typeface="Source Serif 4" pitchFamily="34" charset="-122"/>
+                <a:cs typeface="Source Serif 4" pitchFamily="34" charset="-120"/>
+              </a:rPr>
+              <a:t>در حالت کلی، سیاست "صف اولویت بندی" بهترین عملکرد را دارد. </a:t>
+            </a:r>
+            <a:endParaRPr lang="fa-IR" sz="1100" dirty="0"/>
+          </a:p>
+          <a:p>
+            <a:pPr marL="0" indent="0" algn="r" rtl="1">
+              <a:lnSpc>
+                <a:spcPct val="133000"/>
+              </a:lnSpc>
+              <a:buNone/>
+            </a:pPr>
+            <a:r>
+              <a:rPr lang="fa-IR" altLang="en-US" sz="1100" dirty="0">
+                <a:solidFill>
+                  <a:srgbClr val="504C49"/>
+                </a:solidFill>
+                <a:latin typeface="Source Serif 4" pitchFamily="34" charset="0"/>
+                <a:ea typeface="Source Serif 4" pitchFamily="34" charset="-122"/>
+                <a:cs typeface="Source Serif 4" pitchFamily="34" charset="-120"/>
+              </a:rPr>
+              <a:t>این سیاست در زمان بار عادی تاثیر منفی بر میانگین زمان انتظار ندارد، اما هنگام افزایش تقاضا، باعث می شود کار های حیاتی در اولویت قرار داده شوند. </a:t>
+            </a:r>
+            <a:endParaRPr lang="fa-IR" sz="1100" dirty="0"/>
+          </a:p>
+        </p:txBody>
+      </p:sp>
+    </p:spTree>
+  </p:cSld>
+  <p:clrMapOvr>
+    <a:masterClrMapping/>
+  </p:clrMapOvr>
+</p:sld>
+</file>
+
+<file path=ppt/slides/slide11.xml><?xml version="1.0" encoding="utf-8"?>
 <p:sld xmlns:a="http://schemas.openxmlformats.org/drawingml/2006/main" xmlns:r="http://schemas.openxmlformats.org/officeDocument/2006/relationships" xmlns:p="http://schemas.openxmlformats.org/presentationml/2006/main">
   <p:cSld name="Slide 10">
     <p:spTree>
@@ -1880,29 +2122,7 @@
                 <a:ea typeface="Source Serif 4" pitchFamily="34" charset="-122"/>
                 <a:cs typeface="Source Serif 4" pitchFamily="34" charset="-120"/>
               </a:rPr>
-              <a:t>کسری فولادی | امید </a:t>
-            </a:r>
-            <a:r>
-              <a:rPr lang="fa-IR" altLang="en-US" sz="1100" dirty="0" smtClean="0">
-                <a:solidFill>
-                  <a:srgbClr val="504C49"/>
-                </a:solidFill>
-                <a:latin typeface="Source Serif 4" pitchFamily="34" charset="0"/>
-                <a:ea typeface="Source Serif 4" pitchFamily="34" charset="-122"/>
-                <a:cs typeface="Source Serif 4" pitchFamily="34" charset="-120"/>
-              </a:rPr>
-              <a:t>طالب ‌پور </a:t>
-            </a:r>
-            <a:r>
-              <a:rPr lang="fa-IR" altLang="en-US" sz="1100" dirty="0">
-                <a:solidFill>
-                  <a:srgbClr val="504C49"/>
-                </a:solidFill>
-                <a:latin typeface="Source Serif 4" pitchFamily="34" charset="0"/>
-                <a:ea typeface="Source Serif 4" pitchFamily="34" charset="-122"/>
-                <a:cs typeface="Source Serif 4" pitchFamily="34" charset="-120"/>
-              </a:rPr>
-              <a:t>— بهار ۱۴۰۵</a:t>
+              <a:t>کسری فولادی | امید طالب ‌پور — بهار ۱۴۰۵</a:t>
             </a:r>
             <a:endParaRPr lang="fa-IR" sz="1100" dirty="0"/>
           </a:p>
@@ -2018,7 +2238,7 @@
         </p:spPr>
         <p:txBody>
           <a:bodyPr wrap="square" lIns="0" tIns="0" rIns="0" bIns="0" rtlCol="0" anchor="t">
-            <a:normAutofit/>
+            <a:normAutofit fontScale="85000" lnSpcReduction="20000"/>
           </a:bodyPr>
           <a:lstStyle/>
           <a:p>
@@ -2051,7 +2271,7 @@
               <a:buChar char="•"/>
             </a:pPr>
             <a:r>
-              <a:rPr lang="fa-IR" altLang="en-US" sz="1100" dirty="0">
+              <a:rPr lang="fa-IR" altLang="en-US" sz="1100" dirty="0" smtClean="0">
                 <a:solidFill>
                   <a:srgbClr val="504C49"/>
                 </a:solidFill>
@@ -2059,7 +2279,51 @@
                 <a:ea typeface="Source Serif 4" pitchFamily="34" charset="-122"/>
                 <a:cs typeface="Source Serif 4" pitchFamily="34" charset="-120"/>
               </a:rPr>
-              <a:t>تراشیدن قطعه از دل یک بلوک خام فلزی یا پلاستیکی با دقت میکروسکوپی از طریق اجرای G-code</a:t>
+              <a:t>دستگاه های </a:t>
+            </a:r>
+            <a:r>
+              <a:rPr lang="en-US" altLang="en-US" sz="1100" dirty="0" smtClean="0">
+                <a:solidFill>
+                  <a:srgbClr val="504C49"/>
+                </a:solidFill>
+                <a:latin typeface="Source Serif 4" pitchFamily="34" charset="0"/>
+                <a:ea typeface="Source Serif 4" pitchFamily="34" charset="-122"/>
+                <a:cs typeface="Source Serif 4" pitchFamily="34" charset="-120"/>
+              </a:rPr>
+              <a:t>CNC</a:t>
+            </a:r>
+            <a:r>
+              <a:rPr lang="fa-IR" altLang="en-US" sz="1100" dirty="0" smtClean="0">
+                <a:solidFill>
+                  <a:srgbClr val="504C49"/>
+                </a:solidFill>
+                <a:latin typeface="Source Serif 4" pitchFamily="34" charset="0"/>
+                <a:ea typeface="Source Serif 4" pitchFamily="34" charset="-122"/>
+                <a:cs typeface="Source Serif 4" pitchFamily="34" charset="-120"/>
+              </a:rPr>
+              <a:t>، توانایی تراشیدن </a:t>
+            </a:r>
+            <a:r>
+              <a:rPr lang="fa-IR" altLang="en-US" sz="1100" dirty="0">
+                <a:solidFill>
+                  <a:srgbClr val="504C49"/>
+                </a:solidFill>
+                <a:latin typeface="Source Serif 4" pitchFamily="34" charset="0"/>
+                <a:ea typeface="Source Serif 4" pitchFamily="34" charset="-122"/>
+                <a:cs typeface="Source Serif 4" pitchFamily="34" charset="-120"/>
+              </a:rPr>
+              <a:t>قطعه از دل یک بلوک خام فلزی یا پلاستیکی با دقت میکروسکوپی از طریق اجرای </a:t>
+            </a:r>
+            <a:r>
+              <a:rPr lang="fa-IR" altLang="en-US" sz="1100" dirty="0" smtClean="0">
+                <a:solidFill>
+                  <a:srgbClr val="504C49"/>
+                </a:solidFill>
+                <a:latin typeface="Source Serif 4" pitchFamily="34" charset="0"/>
+                <a:ea typeface="Source Serif 4" pitchFamily="34" charset="-122"/>
+                <a:cs typeface="Source Serif 4" pitchFamily="34" charset="-120"/>
+              </a:rPr>
+              <a:t>G-code را دارند.</a:t>
             </a:r>
             <a:endParaRPr lang="fa-IR" sz="1100" dirty="0"/>
           </a:p>
@@ -2091,7 +2355,84 @@
                 <a:ea typeface="Source Serif 4" pitchFamily="34" charset="-122"/>
                 <a:cs typeface="Source Serif 4" pitchFamily="34" charset="-120"/>
               </a:rPr>
-              <a:t> ۱۰ دستگاه CNC یکسان به عنوان منبع محدود اصلی سیستم</a:t>
+              <a:t> ۱۰ دستگاه CNC یکسان به عنوان منبع محدود اصلی سیستم در نظر گرفته شده (البته سناریو های مختلف نیز بررسی شده). </a:t>
+            </a:r>
+            <a:r>
+              <a:rPr lang="fa-IR" altLang="en-US" sz="1100" dirty="0" smtClean="0">
+                <a:solidFill>
+                  <a:srgbClr val="504C49"/>
+                </a:solidFill>
+                <a:latin typeface="Source Serif 4" pitchFamily="34" charset="0"/>
+                <a:ea typeface="Source Serif 4" pitchFamily="34" charset="-122"/>
+                <a:cs typeface="Source Serif 4" pitchFamily="34" charset="-120"/>
+              </a:rPr>
+              <a:t>دستگاه ها قابلیت خرابی را دارند، همچنین یک سیستم </a:t>
+            </a:r>
+            <a:r>
+              <a:rPr lang="en-US" altLang="en-US" sz="1100" dirty="0" smtClean="0">
+                <a:solidFill>
+                  <a:srgbClr val="504C49"/>
+                </a:solidFill>
+                <a:latin typeface="Source Serif 4" pitchFamily="34" charset="0"/>
+                <a:ea typeface="Source Serif 4" pitchFamily="34" charset="-122"/>
+                <a:cs typeface="Source Serif 4" pitchFamily="34" charset="-120"/>
+              </a:rPr>
+              <a:t>buffer</a:t>
+            </a:r>
+            <a:r>
+              <a:rPr lang="fa-IR" altLang="en-US" sz="1100" dirty="0" smtClean="0">
+                <a:solidFill>
+                  <a:srgbClr val="504C49"/>
+                </a:solidFill>
+                <a:latin typeface="Source Serif 4" pitchFamily="34" charset="0"/>
+                <a:ea typeface="Source Serif 4" pitchFamily="34" charset="-122"/>
+                <a:cs typeface="Source Serif 4" pitchFamily="34" charset="-120"/>
+              </a:rPr>
+              <a:t> برای زمانی که دستگاهی آزاد نیست شبیه سازی شده.  همچنین انواع مختلف پردازش (</a:t>
+            </a:r>
+            <a:r>
+              <a:rPr lang="en-US" altLang="en-US" sz="1100" dirty="0" smtClean="0">
+                <a:solidFill>
+                  <a:srgbClr val="504C49"/>
+                </a:solidFill>
+                <a:latin typeface="Source Serif 4" pitchFamily="34" charset="0"/>
+                <a:ea typeface="Source Serif 4" pitchFamily="34" charset="-122"/>
+                <a:cs typeface="Source Serif 4" pitchFamily="34" charset="-120"/>
+              </a:rPr>
+              <a:t>job</a:t>
+            </a:r>
+            <a:r>
+              <a:rPr lang="fa-IR" altLang="en-US" sz="1100" dirty="0" smtClean="0">
+                <a:solidFill>
+                  <a:srgbClr val="504C49"/>
+                </a:solidFill>
+                <a:latin typeface="Source Serif 4" pitchFamily="34" charset="0"/>
+                <a:ea typeface="Source Serif 4" pitchFamily="34" charset="-122"/>
+                <a:cs typeface="Source Serif 4" pitchFamily="34" charset="-120"/>
+              </a:rPr>
+              <a:t> ها</a:t>
+            </a:r>
+            <a:r>
+              <a:rPr lang="en-US" altLang="en-US" sz="1100" dirty="0" smtClean="0">
+                <a:solidFill>
+                  <a:srgbClr val="504C49"/>
+                </a:solidFill>
+                <a:latin typeface="Source Serif 4" pitchFamily="34" charset="0"/>
+                <a:ea typeface="Source Serif 4" pitchFamily="34" charset="-122"/>
+                <a:cs typeface="Source Serif 4" pitchFamily="34" charset="-120"/>
+              </a:rPr>
+              <a:t>(</a:t>
+            </a:r>
+            <a:r>
+              <a:rPr lang="fa-IR" altLang="en-US" sz="1100" dirty="0" smtClean="0">
+                <a:solidFill>
+                  <a:srgbClr val="504C49"/>
+                </a:solidFill>
+                <a:latin typeface="Source Serif 4" pitchFamily="34" charset="0"/>
+                <a:ea typeface="Source Serif 4" pitchFamily="34" charset="-122"/>
+                <a:cs typeface="Source Serif 4" pitchFamily="34" charset="-120"/>
+              </a:rPr>
+              <a:t> نیز در نظر گرفته شده، و قابلیت های جزئی دیگر که در بررسی مدل سازی آن ها را خواهیم دید. </a:t>
             </a:r>
             <a:endParaRPr lang="fa-IR" sz="1100" dirty="0"/>
           </a:p>
@@ -2107,7 +2448,7 @@
 
 <file path=ppt/slides/slide3.xml><?xml version="1.0" encoding="utf-8"?>
 <p:sld xmlns:a="http://schemas.openxmlformats.org/drawingml/2006/main" xmlns:r="http://schemas.openxmlformats.org/officeDocument/2006/relationships" xmlns:p="http://schemas.openxmlformats.org/presentationml/2006/main">
-  <p:cSld name="Slide 3">
+  <p:cSld>
     <p:spTree>
       <p:nvGrpSpPr>
         <p:cNvPr id="1" name=""/>
@@ -2143,11 +2484,10 @@
           <a:bodyPr wrap="none" lIns="0" tIns="0" rIns="0" bIns="0" rtlCol="0" anchor="t"/>
           <a:lstStyle/>
           <a:p>
-            <a:pPr marL="0" indent="0" algn="r" rtl="1">
+            <a:pPr algn="r" rtl="1">
               <a:lnSpc>
                 <a:spcPct val="104000"/>
               </a:lnSpc>
-              <a:buNone/>
             </a:pPr>
             <a:r>
               <a:rPr lang="fa-IR" altLang="en-US" sz="2350" dirty="0">
@@ -2158,105 +2498,43 @@
                 <a:ea typeface="Platypi Medium" pitchFamily="34" charset="-122"/>
                 <a:cs typeface="Platypi Medium" pitchFamily="34" charset="-120"/>
               </a:rPr>
-              <a:t>گردش کار کارخانه — نمای کلی مدل</a:t>
-            </a:r>
-            <a:endParaRPr lang="fa-IR" sz="2350" dirty="0"/>
-          </a:p>
-        </p:txBody>
-      </p:sp>
-      <p:sp>
-        <p:nvSpPr>
-          <p:cNvPr id="4" name="Text 1"/>
-          <p:cNvSpPr/>
-          <p:nvPr/>
-        </p:nvSpPr>
-        <p:spPr>
-          <a:xfrm>
-            <a:off x="6236110" y="3796581"/>
-            <a:ext cx="1834101" cy="229263"/>
-          </a:xfrm>
-          <a:prstGeom prst="rect">
-            <a:avLst/>
-          </a:prstGeom>
-          <a:noFill/>
-          <a:ln/>
-        </p:spPr>
-        <p:txBody>
-          <a:bodyPr wrap="none" lIns="0" tIns="0" rIns="0" bIns="0" rtlCol="0" anchor="t"/>
-          <a:lstStyle/>
-          <a:p>
-            <a:pPr marL="0" indent="0" algn="r" rtl="1">
-              <a:lnSpc>
-                <a:spcPct val="104000"/>
-              </a:lnSpc>
-              <a:buNone/>
-            </a:pPr>
-            <a:r>
-              <a:rPr lang="fa-IR" altLang="en-US" sz="1400" dirty="0">
-                <a:solidFill>
-                  <a:srgbClr val="FFFFFF"/>
+              <a:t>مدل سازی – روند پردازش قطعات (</a:t>
+            </a:r>
+            <a:r>
+              <a:rPr lang="en-US" altLang="en-US" sz="2350" dirty="0">
+                <a:solidFill>
+                  <a:srgbClr val="201B18"/>
                 </a:solidFill>
                 <a:latin typeface="Platypi Medium" pitchFamily="34" charset="0"/>
                 <a:ea typeface="Platypi Medium" pitchFamily="34" charset="-122"/>
                 <a:cs typeface="Platypi Medium" pitchFamily="34" charset="-120"/>
               </a:rPr>
-              <a:t>ماشین‌های CNC</a:t>
-            </a:r>
-            <a:endParaRPr lang="fa-IR" sz="1400" dirty="0"/>
-          </a:p>
-        </p:txBody>
-      </p:sp>
-      <p:sp>
-        <p:nvSpPr>
-          <p:cNvPr id="5" name="Text 2"/>
-          <p:cNvSpPr/>
-          <p:nvPr/>
-        </p:nvSpPr>
-        <p:spPr>
-          <a:xfrm>
-            <a:off x="6236110" y="2989577"/>
-            <a:ext cx="1834101" cy="229263"/>
-          </a:xfrm>
-          <a:prstGeom prst="rect">
-            <a:avLst/>
-          </a:prstGeom>
-          <a:noFill/>
-          <a:ln/>
-        </p:spPr>
-        <p:txBody>
-          <a:bodyPr wrap="none" lIns="0" tIns="0" rIns="0" bIns="0" rtlCol="0" anchor="t"/>
-          <a:lstStyle/>
-          <a:p>
-            <a:pPr marL="0" indent="0" algn="r" rtl="1">
-              <a:lnSpc>
-                <a:spcPct val="104000"/>
-              </a:lnSpc>
-              <a:buNone/>
-            </a:pPr>
-            <a:r>
-              <a:rPr lang="ar-SA" altLang="en-US" sz="1400" dirty="0">
-                <a:solidFill>
-                  <a:srgbClr val="FFFFFF"/>
+              <a:t>job</a:t>
+            </a:r>
+            <a:r>
+              <a:rPr lang="fa-IR" altLang="en-US" sz="2350" dirty="0">
+                <a:solidFill>
+                  <a:srgbClr val="201B18"/>
                 </a:solidFill>
                 <a:latin typeface="Platypi Medium" pitchFamily="34" charset="0"/>
                 <a:ea typeface="Platypi Medium" pitchFamily="34" charset="-122"/>
                 <a:cs typeface="Platypi Medium" pitchFamily="34" charset="-120"/>
               </a:rPr>
-              <a:t>صف/بافر</a:t>
-            </a:r>
-            <a:endParaRPr lang="ar-SA" sz="1400" dirty="0"/>
-          </a:p>
-        </p:txBody>
-      </p:sp>
-      <p:sp>
-        <p:nvSpPr>
-          <p:cNvPr id="6" name="Text 3"/>
-          <p:cNvSpPr/>
-          <p:nvPr/>
-        </p:nvSpPr>
-        <p:spPr>
-          <a:xfrm>
-            <a:off x="6236110" y="2190724"/>
+              <a:t> ها)</a:t>
+            </a:r>
+            <a:endParaRPr lang="fa-IR" sz="2350" dirty="0"/>
+          </a:p>
+        </p:txBody>
+      </p:sp>
+      <p:sp>
+        <p:nvSpPr>
+          <p:cNvPr id="4" name="Text 1"/>
+          <p:cNvSpPr/>
+          <p:nvPr/>
+        </p:nvSpPr>
+        <p:spPr>
+          <a:xfrm>
+            <a:off x="6236110" y="3796581"/>
             <a:ext cx="1834101" cy="229263"/>
           </a:xfrm>
           <a:prstGeom prst="rect">
@@ -2284,7 +2562,7 @@
                 <a:ea typeface="Platypi Medium" pitchFamily="34" charset="-122"/>
                 <a:cs typeface="Platypi Medium" pitchFamily="34" charset="-120"/>
               </a:rPr>
-              <a:t>بازرسی</a:t>
+              <a:t>ماشین‌های CNC</a:t>
             </a:r>
             <a:endParaRPr lang="fa-IR" sz="1400" dirty="0"/>
           </a:p>
@@ -2292,13 +2570,13 @@
       </p:sp>
       <p:sp>
         <p:nvSpPr>
-          <p:cNvPr id="7" name="Text 4"/>
-          <p:cNvSpPr/>
-          <p:nvPr/>
-        </p:nvSpPr>
-        <p:spPr>
-          <a:xfrm>
-            <a:off x="6236110" y="1383719"/>
+          <p:cNvPr id="5" name="Text 2"/>
+          <p:cNvSpPr/>
+          <p:nvPr/>
+        </p:nvSpPr>
+        <p:spPr>
+          <a:xfrm>
+            <a:off x="6236110" y="2989577"/>
             <a:ext cx="1834101" cy="229263"/>
           </a:xfrm>
           <a:prstGeom prst="rect">
@@ -2326,13 +2604,156 @@
                 <a:ea typeface="Platypi Medium" pitchFamily="34" charset="-122"/>
                 <a:cs typeface="Platypi Medium" pitchFamily="34" charset="-120"/>
               </a:rPr>
+              <a:t>صف/بافر</a:t>
+            </a:r>
+            <a:endParaRPr lang="ar-SA" sz="1400" dirty="0"/>
+          </a:p>
+        </p:txBody>
+      </p:sp>
+      <p:sp>
+        <p:nvSpPr>
+          <p:cNvPr id="6" name="Text 3"/>
+          <p:cNvSpPr/>
+          <p:nvPr/>
+        </p:nvSpPr>
+        <p:spPr>
+          <a:xfrm>
+            <a:off x="6236110" y="2190724"/>
+            <a:ext cx="1834101" cy="229263"/>
+          </a:xfrm>
+          <a:prstGeom prst="rect">
+            <a:avLst/>
+          </a:prstGeom>
+          <a:noFill/>
+          <a:ln/>
+        </p:spPr>
+        <p:txBody>
+          <a:bodyPr wrap="none" lIns="0" tIns="0" rIns="0" bIns="0" rtlCol="0" anchor="t"/>
+          <a:lstStyle/>
+          <a:p>
+            <a:pPr marL="0" indent="0" algn="r" rtl="1">
+              <a:lnSpc>
+                <a:spcPct val="104000"/>
+              </a:lnSpc>
+              <a:buNone/>
+            </a:pPr>
+            <a:r>
+              <a:rPr lang="fa-IR" altLang="en-US" sz="1400" dirty="0">
+                <a:solidFill>
+                  <a:srgbClr val="FFFFFF"/>
+                </a:solidFill>
+                <a:latin typeface="Platypi Medium" pitchFamily="34" charset="0"/>
+                <a:ea typeface="Platypi Medium" pitchFamily="34" charset="-122"/>
+                <a:cs typeface="Platypi Medium" pitchFamily="34" charset="-120"/>
+              </a:rPr>
+              <a:t>بازرسی</a:t>
+            </a:r>
+            <a:endParaRPr lang="fa-IR" sz="1400" dirty="0"/>
+          </a:p>
+        </p:txBody>
+      </p:sp>
+      <p:sp>
+        <p:nvSpPr>
+          <p:cNvPr id="7" name="Text 4"/>
+          <p:cNvSpPr/>
+          <p:nvPr/>
+        </p:nvSpPr>
+        <p:spPr>
+          <a:xfrm>
+            <a:off x="6236110" y="1383719"/>
+            <a:ext cx="1834101" cy="229263"/>
+          </a:xfrm>
+          <a:prstGeom prst="rect">
+            <a:avLst/>
+          </a:prstGeom>
+          <a:noFill/>
+          <a:ln/>
+        </p:spPr>
+        <p:txBody>
+          <a:bodyPr wrap="none" lIns="0" tIns="0" rIns="0" bIns="0" rtlCol="0" anchor="t"/>
+          <a:lstStyle/>
+          <a:p>
+            <a:pPr marL="0" indent="0" algn="r" rtl="1">
+              <a:lnSpc>
+                <a:spcPct val="104000"/>
+              </a:lnSpc>
+              <a:buNone/>
+            </a:pPr>
+            <a:r>
+              <a:rPr lang="ar-SA" altLang="en-US" sz="1400" dirty="0">
+                <a:solidFill>
+                  <a:srgbClr val="FFFFFF"/>
+                </a:solidFill>
+                <a:latin typeface="Platypi Medium" pitchFamily="34" charset="0"/>
+                <a:ea typeface="Platypi Medium" pitchFamily="34" charset="-122"/>
+                <a:cs typeface="Platypi Medium" pitchFamily="34" charset="-120"/>
+              </a:rPr>
               <a:t>ورود</a:t>
             </a:r>
             <a:endParaRPr lang="ar-SA" sz="1400" dirty="0"/>
           </a:p>
         </p:txBody>
       </p:sp>
+      <p:pic>
+        <p:nvPicPr>
+          <p:cNvPr id="1028" name="Picture 4"/>
+          <p:cNvPicPr>
+            <a:picLocks noChangeAspect="1" noChangeArrowheads="1"/>
+          </p:cNvPicPr>
+          <p:nvPr/>
+        </p:nvPicPr>
+        <p:blipFill>
+          <a:blip r:embed="rId3">
+            <a:extLst>
+              <a:ext uri="{28A0092B-C50C-407E-A947-70E740481C1C}">
+                <a14:useLocalDpi xmlns:a14="http://schemas.microsoft.com/office/drawing/2010/main" val="0"/>
+              </a:ext>
+            </a:extLst>
+          </a:blip>
+          <a:srcRect/>
+          <a:stretch>
+            <a:fillRect/>
+          </a:stretch>
+        </p:blipFill>
+        <p:spPr bwMode="auto">
+          <a:xfrm>
+            <a:off x="0" y="1167718"/>
+            <a:ext cx="9144000" cy="3160442"/>
+          </a:xfrm>
+          <a:prstGeom prst="rect">
+            <a:avLst/>
+          </a:prstGeom>
+          <a:noFill/>
+          <a:ln>
+            <a:noFill/>
+          </a:ln>
+          <a:extLst>
+            <a:ext uri="{909E8E84-426E-40DD-AFC4-6F175D3DCCD1}">
+              <a14:hiddenFill xmlns:a14="http://schemas.microsoft.com/office/drawing/2010/main">
+                <a:solidFill>
+                  <a:schemeClr val="accent1"/>
+                </a:solidFill>
+              </a14:hiddenFill>
+            </a:ext>
+            <a:ext uri="{91240B29-F687-4F45-9708-019B960494DF}">
+              <a14:hiddenLine xmlns:a14="http://schemas.microsoft.com/office/drawing/2010/main" w="9525">
+                <a:solidFill>
+                  <a:schemeClr val="tx1"/>
+                </a:solidFill>
+                <a:miter lim="800000"/>
+                <a:headEnd/>
+                <a:tailEnd/>
+              </a14:hiddenLine>
+            </a:ext>
+          </a:extLst>
+        </p:spPr>
+      </p:pic>
     </p:spTree>
+    <p:extLst>
+      <p:ext uri="{BB962C8B-B14F-4D97-AF65-F5344CB8AC3E}">
+        <p14:creationId xmlns:p14="http://schemas.microsoft.com/office/powerpoint/2010/main" val="4166475212"/>
+      </p:ext>
+    </p:extLst>
   </p:cSld>
   <p:clrMapOvr>
     <a:masterClrMapping/>
@@ -2341,6 +2762,311 @@
 </file>
 
 <file path=ppt/slides/slide4.xml><?xml version="1.0" encoding="utf-8"?>
+<p:sld xmlns:a="http://schemas.openxmlformats.org/drawingml/2006/main" xmlns:r="http://schemas.openxmlformats.org/officeDocument/2006/relationships" xmlns:p="http://schemas.openxmlformats.org/presentationml/2006/main">
+  <p:cSld>
+    <p:spTree>
+      <p:nvGrpSpPr>
+        <p:cNvPr id="1" name=""/>
+        <p:cNvGrpSpPr/>
+        <p:nvPr/>
+      </p:nvGrpSpPr>
+      <p:grpSpPr>
+        <a:xfrm>
+          <a:off x="0" y="0"/>
+          <a:ext cx="0" cy="0"/>
+          <a:chOff x="0" y="0"/>
+          <a:chExt cx="0" cy="0"/>
+        </a:xfrm>
+      </p:grpSpPr>
+      <p:sp>
+        <p:nvSpPr>
+          <p:cNvPr id="2" name="Text 0"/>
+          <p:cNvSpPr/>
+          <p:nvPr/>
+        </p:nvSpPr>
+        <p:spPr>
+          <a:xfrm>
+            <a:off x="496119" y="395883"/>
+            <a:ext cx="8151763" cy="373782"/>
+          </a:xfrm>
+          <a:prstGeom prst="rect">
+            <a:avLst/>
+          </a:prstGeom>
+          <a:noFill/>
+          <a:ln/>
+        </p:spPr>
+        <p:txBody>
+          <a:bodyPr wrap="none" lIns="0" tIns="0" rIns="0" bIns="0" rtlCol="0" anchor="t"/>
+          <a:lstStyle/>
+          <a:p>
+            <a:pPr marL="0" indent="0" algn="r" rtl="1">
+              <a:lnSpc>
+                <a:spcPct val="104000"/>
+              </a:lnSpc>
+              <a:buNone/>
+            </a:pPr>
+            <a:r>
+              <a:rPr lang="fa-IR" altLang="en-US" sz="2350" dirty="0">
+                <a:solidFill>
+                  <a:srgbClr val="201B18"/>
+                </a:solidFill>
+                <a:latin typeface="Platypi Medium" pitchFamily="34" charset="0"/>
+                <a:ea typeface="Platypi Medium" pitchFamily="34" charset="-122"/>
+                <a:cs typeface="Platypi Medium" pitchFamily="34" charset="-120"/>
+              </a:rPr>
+              <a:t>مدل سازی </a:t>
+            </a:r>
+            <a:r>
+              <a:rPr lang="fa-IR" altLang="en-US" sz="2350" dirty="0" smtClean="0">
+                <a:solidFill>
+                  <a:srgbClr val="201B18"/>
+                </a:solidFill>
+                <a:latin typeface="Platypi Medium" pitchFamily="34" charset="0"/>
+                <a:ea typeface="Platypi Medium" pitchFamily="34" charset="-122"/>
+                <a:cs typeface="Platypi Medium" pitchFamily="34" charset="-120"/>
+              </a:rPr>
+              <a:t>– روند کار و خرابی دستگاه</a:t>
+            </a:r>
+            <a:endParaRPr lang="fa-IR" sz="2350" dirty="0"/>
+          </a:p>
+        </p:txBody>
+      </p:sp>
+      <p:sp>
+        <p:nvSpPr>
+          <p:cNvPr id="4" name="Text 1"/>
+          <p:cNvSpPr/>
+          <p:nvPr/>
+        </p:nvSpPr>
+        <p:spPr>
+          <a:xfrm>
+            <a:off x="6236110" y="3796581"/>
+            <a:ext cx="1834101" cy="229263"/>
+          </a:xfrm>
+          <a:prstGeom prst="rect">
+            <a:avLst/>
+          </a:prstGeom>
+          <a:noFill/>
+          <a:ln/>
+        </p:spPr>
+        <p:txBody>
+          <a:bodyPr wrap="none" lIns="0" tIns="0" rIns="0" bIns="0" rtlCol="0" anchor="t"/>
+          <a:lstStyle/>
+          <a:p>
+            <a:pPr marL="0" indent="0" algn="r" rtl="1">
+              <a:lnSpc>
+                <a:spcPct val="104000"/>
+              </a:lnSpc>
+              <a:buNone/>
+            </a:pPr>
+            <a:r>
+              <a:rPr lang="fa-IR" altLang="en-US" sz="1400" dirty="0">
+                <a:solidFill>
+                  <a:srgbClr val="FFFFFF"/>
+                </a:solidFill>
+                <a:latin typeface="Platypi Medium" pitchFamily="34" charset="0"/>
+                <a:ea typeface="Platypi Medium" pitchFamily="34" charset="-122"/>
+                <a:cs typeface="Platypi Medium" pitchFamily="34" charset="-120"/>
+              </a:rPr>
+              <a:t>ماشین‌های CNC</a:t>
+            </a:r>
+            <a:endParaRPr lang="fa-IR" sz="1400" dirty="0"/>
+          </a:p>
+        </p:txBody>
+      </p:sp>
+      <p:sp>
+        <p:nvSpPr>
+          <p:cNvPr id="5" name="Text 2"/>
+          <p:cNvSpPr/>
+          <p:nvPr/>
+        </p:nvSpPr>
+        <p:spPr>
+          <a:xfrm>
+            <a:off x="6236110" y="2989577"/>
+            <a:ext cx="1834101" cy="229263"/>
+          </a:xfrm>
+          <a:prstGeom prst="rect">
+            <a:avLst/>
+          </a:prstGeom>
+          <a:noFill/>
+          <a:ln/>
+        </p:spPr>
+        <p:txBody>
+          <a:bodyPr wrap="none" lIns="0" tIns="0" rIns="0" bIns="0" rtlCol="0" anchor="t"/>
+          <a:lstStyle/>
+          <a:p>
+            <a:pPr marL="0" indent="0" algn="r" rtl="1">
+              <a:lnSpc>
+                <a:spcPct val="104000"/>
+              </a:lnSpc>
+              <a:buNone/>
+            </a:pPr>
+            <a:r>
+              <a:rPr lang="ar-SA" altLang="en-US" sz="1400" dirty="0">
+                <a:solidFill>
+                  <a:srgbClr val="FFFFFF"/>
+                </a:solidFill>
+                <a:latin typeface="Platypi Medium" pitchFamily="34" charset="0"/>
+                <a:ea typeface="Platypi Medium" pitchFamily="34" charset="-122"/>
+                <a:cs typeface="Platypi Medium" pitchFamily="34" charset="-120"/>
+              </a:rPr>
+              <a:t>صف/بافر</a:t>
+            </a:r>
+            <a:endParaRPr lang="ar-SA" sz="1400" dirty="0"/>
+          </a:p>
+        </p:txBody>
+      </p:sp>
+      <p:sp>
+        <p:nvSpPr>
+          <p:cNvPr id="6" name="Text 3"/>
+          <p:cNvSpPr/>
+          <p:nvPr/>
+        </p:nvSpPr>
+        <p:spPr>
+          <a:xfrm>
+            <a:off x="6236110" y="2190724"/>
+            <a:ext cx="1834101" cy="229263"/>
+          </a:xfrm>
+          <a:prstGeom prst="rect">
+            <a:avLst/>
+          </a:prstGeom>
+          <a:noFill/>
+          <a:ln/>
+        </p:spPr>
+        <p:txBody>
+          <a:bodyPr wrap="none" lIns="0" tIns="0" rIns="0" bIns="0" rtlCol="0" anchor="t"/>
+          <a:lstStyle/>
+          <a:p>
+            <a:pPr marL="0" indent="0" algn="r" rtl="1">
+              <a:lnSpc>
+                <a:spcPct val="104000"/>
+              </a:lnSpc>
+              <a:buNone/>
+            </a:pPr>
+            <a:r>
+              <a:rPr lang="fa-IR" altLang="en-US" sz="1400" dirty="0">
+                <a:solidFill>
+                  <a:srgbClr val="FFFFFF"/>
+                </a:solidFill>
+                <a:latin typeface="Platypi Medium" pitchFamily="34" charset="0"/>
+                <a:ea typeface="Platypi Medium" pitchFamily="34" charset="-122"/>
+                <a:cs typeface="Platypi Medium" pitchFamily="34" charset="-120"/>
+              </a:rPr>
+              <a:t>بازرسی</a:t>
+            </a:r>
+            <a:endParaRPr lang="fa-IR" sz="1400" dirty="0"/>
+          </a:p>
+        </p:txBody>
+      </p:sp>
+      <p:sp>
+        <p:nvSpPr>
+          <p:cNvPr id="7" name="Text 4"/>
+          <p:cNvSpPr/>
+          <p:nvPr/>
+        </p:nvSpPr>
+        <p:spPr>
+          <a:xfrm>
+            <a:off x="6236110" y="1383719"/>
+            <a:ext cx="1834101" cy="229263"/>
+          </a:xfrm>
+          <a:prstGeom prst="rect">
+            <a:avLst/>
+          </a:prstGeom>
+          <a:noFill/>
+          <a:ln/>
+        </p:spPr>
+        <p:txBody>
+          <a:bodyPr wrap="none" lIns="0" tIns="0" rIns="0" bIns="0" rtlCol="0" anchor="t"/>
+          <a:lstStyle/>
+          <a:p>
+            <a:pPr marL="0" indent="0" algn="r" rtl="1">
+              <a:lnSpc>
+                <a:spcPct val="104000"/>
+              </a:lnSpc>
+              <a:buNone/>
+            </a:pPr>
+            <a:r>
+              <a:rPr lang="ar-SA" altLang="en-US" sz="1400" dirty="0">
+                <a:solidFill>
+                  <a:srgbClr val="FFFFFF"/>
+                </a:solidFill>
+                <a:latin typeface="Platypi Medium" pitchFamily="34" charset="0"/>
+                <a:ea typeface="Platypi Medium" pitchFamily="34" charset="-122"/>
+                <a:cs typeface="Platypi Medium" pitchFamily="34" charset="-120"/>
+              </a:rPr>
+              <a:t>ورود</a:t>
+            </a:r>
+            <a:endParaRPr lang="ar-SA" sz="1400" dirty="0"/>
+          </a:p>
+        </p:txBody>
+      </p:sp>
+      <p:pic>
+        <p:nvPicPr>
+          <p:cNvPr id="2050" name="Picture 2"/>
+          <p:cNvPicPr>
+            <a:picLocks noChangeAspect="1" noChangeArrowheads="1"/>
+          </p:cNvPicPr>
+          <p:nvPr/>
+        </p:nvPicPr>
+        <p:blipFill>
+          <a:blip r:embed="rId3">
+            <a:extLst>
+              <a:ext uri="{28A0092B-C50C-407E-A947-70E740481C1C}">
+                <a14:useLocalDpi xmlns:a14="http://schemas.microsoft.com/office/drawing/2010/main" val="0"/>
+              </a:ext>
+            </a:extLst>
+          </a:blip>
+          <a:srcRect/>
+          <a:stretch>
+            <a:fillRect/>
+          </a:stretch>
+        </p:blipFill>
+        <p:spPr bwMode="auto">
+          <a:xfrm>
+            <a:off x="-30480" y="990247"/>
+            <a:ext cx="9144000" cy="3078833"/>
+          </a:xfrm>
+          <a:prstGeom prst="rect">
+            <a:avLst/>
+          </a:prstGeom>
+          <a:noFill/>
+          <a:ln>
+            <a:noFill/>
+          </a:ln>
+          <a:extLst>
+            <a:ext uri="{909E8E84-426E-40DD-AFC4-6F175D3DCCD1}">
+              <a14:hiddenFill xmlns:a14="http://schemas.microsoft.com/office/drawing/2010/main">
+                <a:solidFill>
+                  <a:schemeClr val="accent1"/>
+                </a:solidFill>
+              </a14:hiddenFill>
+            </a:ext>
+            <a:ext uri="{91240B29-F687-4F45-9708-019B960494DF}">
+              <a14:hiddenLine xmlns:a14="http://schemas.microsoft.com/office/drawing/2010/main" w="9525">
+                <a:solidFill>
+                  <a:schemeClr val="tx1"/>
+                </a:solidFill>
+                <a:miter lim="800000"/>
+                <a:headEnd/>
+                <a:tailEnd/>
+              </a14:hiddenLine>
+            </a:ext>
+          </a:extLst>
+        </p:spPr>
+      </p:pic>
+    </p:spTree>
+    <p:extLst>
+      <p:ext uri="{BB962C8B-B14F-4D97-AF65-F5344CB8AC3E}">
+        <p14:creationId xmlns:p14="http://schemas.microsoft.com/office/powerpoint/2010/main" val="1497629580"/>
+      </p:ext>
+    </p:extLst>
+  </p:cSld>
+  <p:clrMapOvr>
+    <a:masterClrMapping/>
+  </p:clrMapOvr>
+</p:sld>
+</file>
+
+<file path=ppt/slides/slide5.xml><?xml version="1.0" encoding="utf-8"?>
 <p:sld xmlns:a="http://schemas.openxmlformats.org/drawingml/2006/main" xmlns:r="http://schemas.openxmlformats.org/officeDocument/2006/relationships" xmlns:p="http://schemas.openxmlformats.org/presentationml/2006/main">
   <p:cSld name="Slide 4">
     <p:spTree>
@@ -2393,10 +3119,10 @@
                 <a:ea typeface="Platypi Medium" pitchFamily="34" charset="-122"/>
                 <a:cs typeface="Platypi Medium" pitchFamily="34" charset="-120"/>
               </a:rPr>
-              <a:t>توزیع‌ های آماری مورد </a:t>
-            </a:r>
-            <a:r>
-              <a:rPr lang="fa-IR" altLang="en-US" sz="2750" dirty="0" smtClean="0">
+              <a:t>توزیع‌ های آماری مورد استفاده</a:t>
+            </a:r>
+            <a:r>
+              <a:rPr lang="en-US" altLang="en-US" sz="2750" dirty="0">
                 <a:solidFill>
                   <a:srgbClr val="201B18"/>
                 </a:solidFill>
@@ -2404,21 +3130,10 @@
                 <a:ea typeface="Platypi Medium" pitchFamily="34" charset="-122"/>
                 <a:cs typeface="Platypi Medium" pitchFamily="34" charset="-120"/>
               </a:rPr>
-              <a:t>استفاده</a:t>
-            </a:r>
-            <a:r>
-              <a:rPr lang="en-US" altLang="en-US" sz="2750" dirty="0" smtClean="0">
-                <a:solidFill>
-                  <a:srgbClr val="201B18"/>
-                </a:solidFill>
-                <a:latin typeface="Platypi Medium" pitchFamily="34" charset="0"/>
-                <a:ea typeface="Platypi Medium" pitchFamily="34" charset="-122"/>
-                <a:cs typeface="Platypi Medium" pitchFamily="34" charset="-120"/>
-              </a:rPr>
               <a:t> </a:t>
             </a:r>
             <a:r>
-              <a:rPr lang="fa-IR" altLang="en-US" sz="2750" dirty="0" smtClean="0">
+              <a:rPr lang="fa-IR" altLang="en-US" sz="2750" dirty="0">
                 <a:solidFill>
                   <a:srgbClr val="201B18"/>
                 </a:solidFill>
@@ -2498,7 +3213,18 @@
                 <a:ea typeface="Platypi Medium" pitchFamily="34" charset="-122"/>
                 <a:cs typeface="Platypi Medium" pitchFamily="34" charset="-120"/>
               </a:rPr>
-              <a:t>زمان بین ورودها</a:t>
+              <a:t>زمان بین </a:t>
+            </a:r>
+            <a:r>
+              <a:rPr lang="fa-IR" altLang="en-US" sz="1350" dirty="0" smtClean="0">
+                <a:solidFill>
+                  <a:srgbClr val="504C49"/>
+                </a:solidFill>
+                <a:latin typeface="Platypi Medium" pitchFamily="34" charset="0"/>
+                <a:ea typeface="Platypi Medium" pitchFamily="34" charset="-122"/>
+                <a:cs typeface="Platypi Medium" pitchFamily="34" charset="-120"/>
+              </a:rPr>
+              <a:t>ورود های قطعات:</a:t>
             </a:r>
             <a:endParaRPr lang="fa-IR" sz="1350" dirty="0"/>
           </a:p>
@@ -2540,18 +3266,18 @@
                 <a:ea typeface="Source Serif 4 Bold" pitchFamily="34" charset="-122"/>
                 <a:cs typeface="Source Serif 4 Bold" pitchFamily="34" charset="-120"/>
               </a:rPr>
-              <a:t>نمایی (Exponential)</a:t>
-            </a:r>
-            <a:r>
-              <a:rPr lang="fa-IR" altLang="en-US" sz="1100" dirty="0">
-                <a:solidFill>
-                  <a:srgbClr val="504C49"/>
-                </a:solidFill>
-                <a:latin typeface="Source Serif 4" pitchFamily="34" charset="0"/>
-                <a:ea typeface="Source Serif 4" pitchFamily="34" charset="-122"/>
-                <a:cs typeface="Source Serif 4" pitchFamily="34" charset="-120"/>
-              </a:rPr>
-              <a:t> — شوک‌ های تصادفی با نرخ ثابت ورود</a:t>
+              <a:t>نمایی (Exponential</a:t>
+            </a:r>
+            <a:r>
+              <a:rPr lang="fa-IR" altLang="en-US" sz="1100" b="1" dirty="0" smtClean="0">
+                <a:solidFill>
+                  <a:srgbClr val="504C49"/>
+                </a:solidFill>
+                <a:latin typeface="Source Serif 4 Bold" pitchFamily="34" charset="0"/>
+                <a:ea typeface="Source Serif 4 Bold" pitchFamily="34" charset="-122"/>
+                <a:cs typeface="Source Serif 4 Bold" pitchFamily="34" charset="-120"/>
+              </a:rPr>
+              <a:t>)</a:t>
             </a:r>
             <a:endParaRPr lang="fa-IR" sz="1100" dirty="0"/>
           </a:p>
@@ -2569,7 +3295,7 @@
           <a:blip r:embed="rId3">
             <a:extLst>
               <a:ext uri="{96DAC541-7B7A-43D3-8B79-37D633B846F1}">
-                <asvg:svgBlip xmlns:asvg="http://schemas.microsoft.com/office/drawing/2016/SVG/main" xmlns="" r:embed="rId5"/>
+                <asvg:svgBlip xmlns:asvg="http://schemas.microsoft.com/office/drawing/2016/SVG/main" xmlns="" r:embed="rId4"/>
               </a:ext>
             </a:extLst>
           </a:blip>
@@ -2623,7 +3349,40 @@
                 <a:ea typeface="Platypi Medium" pitchFamily="34" charset="-122"/>
                 <a:cs typeface="Platypi Medium" pitchFamily="34" charset="-120"/>
               </a:rPr>
-              <a:t>زمان پردازش</a:t>
+              <a:t>زمان </a:t>
+            </a:r>
+            <a:r>
+              <a:rPr lang="fa-IR" altLang="en-US" sz="1350" dirty="0" smtClean="0">
+                <a:solidFill>
+                  <a:srgbClr val="504C49"/>
+                </a:solidFill>
+                <a:latin typeface="Platypi Medium" pitchFamily="34" charset="0"/>
+                <a:ea typeface="Platypi Medium" pitchFamily="34" charset="-122"/>
+                <a:cs typeface="Platypi Medium" pitchFamily="34" charset="-120"/>
+              </a:rPr>
+              <a:t>پردازش قطعات (</a:t>
+            </a:r>
+            <a:r>
+              <a:rPr lang="en-US" altLang="en-US" sz="1350" dirty="0" smtClean="0">
+                <a:solidFill>
+                  <a:srgbClr val="504C49"/>
+                </a:solidFill>
+                <a:latin typeface="Platypi Medium" pitchFamily="34" charset="0"/>
+                <a:ea typeface="Platypi Medium" pitchFamily="34" charset="-122"/>
+                <a:cs typeface="Platypi Medium" pitchFamily="34" charset="-120"/>
+              </a:rPr>
+              <a:t>job</a:t>
+            </a:r>
+            <a:r>
+              <a:rPr lang="fa-IR" altLang="en-US" sz="1350" dirty="0" smtClean="0">
+                <a:solidFill>
+                  <a:srgbClr val="504C49"/>
+                </a:solidFill>
+                <a:latin typeface="Platypi Medium" pitchFamily="34" charset="0"/>
+                <a:ea typeface="Platypi Medium" pitchFamily="34" charset="-122"/>
+                <a:cs typeface="Platypi Medium" pitchFamily="34" charset="-120"/>
+              </a:rPr>
+              <a:t> ها):</a:t>
             </a:r>
             <a:endParaRPr lang="fa-IR" sz="1350" dirty="0"/>
           </a:p>
@@ -2665,18 +3424,18 @@
                 <a:ea typeface="Source Serif 4 Bold" pitchFamily="34" charset="-122"/>
                 <a:cs typeface="Source Serif 4 Bold" pitchFamily="34" charset="-120"/>
               </a:rPr>
-              <a:t>لگ‌ نرمال (Log-normal)</a:t>
-            </a:r>
-            <a:r>
-              <a:rPr lang="fa-IR" altLang="en-US" sz="1100" dirty="0">
-                <a:solidFill>
-                  <a:srgbClr val="504C49"/>
-                </a:solidFill>
-                <a:latin typeface="Source Serif 4" pitchFamily="34" charset="0"/>
-                <a:ea typeface="Source Serif 4" pitchFamily="34" charset="-122"/>
-                <a:cs typeface="Source Serif 4" pitchFamily="34" charset="-120"/>
-              </a:rPr>
-              <a:t> — کارهای طولانی نادر</a:t>
+              <a:t>لگ‌ نرمال (Log-normal</a:t>
+            </a:r>
+            <a:r>
+              <a:rPr lang="fa-IR" altLang="en-US" sz="1100" b="1" dirty="0" smtClean="0">
+                <a:solidFill>
+                  <a:srgbClr val="504C49"/>
+                </a:solidFill>
+                <a:latin typeface="Source Serif 4 Bold" pitchFamily="34" charset="0"/>
+                <a:ea typeface="Source Serif 4 Bold" pitchFamily="34" charset="-122"/>
+                <a:cs typeface="Source Serif 4 Bold" pitchFamily="34" charset="-120"/>
+              </a:rPr>
+              <a:t>)</a:t>
             </a:r>
             <a:endParaRPr lang="fa-IR" sz="1100" dirty="0"/>
           </a:p>
@@ -2694,7 +3453,7 @@
           <a:blip r:embed="rId3">
             <a:extLst>
               <a:ext uri="{96DAC541-7B7A-43D3-8B79-37D633B846F1}">
-                <asvg:svgBlip xmlns:asvg="http://schemas.microsoft.com/office/drawing/2016/SVG/main" xmlns="" r:embed="rId6"/>
+                <asvg:svgBlip xmlns:asvg="http://schemas.microsoft.com/office/drawing/2016/SVG/main" xmlns="" r:embed="rId4"/>
               </a:ext>
             </a:extLst>
           </a:blip>
@@ -2740,7 +3499,7 @@
               <a:buNone/>
             </a:pPr>
             <a:r>
-              <a:rPr lang="fa-IR" altLang="en-US" sz="1350" dirty="0">
+              <a:rPr lang="fa-IR" altLang="en-US" sz="1350" dirty="0" smtClean="0">
                 <a:solidFill>
                   <a:srgbClr val="504C49"/>
                 </a:solidFill>
@@ -2748,7 +3507,7 @@
                 <a:ea typeface="Platypi Medium" pitchFamily="34" charset="-122"/>
                 <a:cs typeface="Platypi Medium" pitchFamily="34" charset="-120"/>
               </a:rPr>
-              <a:t>ریسک کیفیت</a:t>
+              <a:t>ریسک قبول نشدن در تست کیفیت: </a:t>
             </a:r>
             <a:endParaRPr lang="fa-IR" sz="1350" dirty="0"/>
           </a:p>
@@ -2790,18 +3549,18 @@
                 <a:ea typeface="Source Serif 4 Bold" pitchFamily="34" charset="-122"/>
                 <a:cs typeface="Source Serif 4 Bold" pitchFamily="34" charset="-120"/>
               </a:rPr>
-              <a:t>بتا (۲،۲)</a:t>
-            </a:r>
-            <a:r>
-              <a:rPr lang="fa-IR" altLang="en-US" sz="1100" dirty="0">
-                <a:solidFill>
-                  <a:srgbClr val="504C49"/>
-                </a:solidFill>
-                <a:latin typeface="Source Serif 4" pitchFamily="34" charset="0"/>
-                <a:ea typeface="Source Serif 4" pitchFamily="34" charset="-122"/>
-                <a:cs typeface="Source Serif 4" pitchFamily="34" charset="-120"/>
-              </a:rPr>
-              <a:t> — ریسک‌های متوسط محتمل‌ تر از ریسک‌های افراطی</a:t>
+              <a:t>بتا (</a:t>
+            </a:r>
+            <a:r>
+              <a:rPr lang="ar-SA" altLang="en-US" sz="1100" b="1" dirty="0" smtClean="0">
+                <a:solidFill>
+                  <a:srgbClr val="504C49"/>
+                </a:solidFill>
+                <a:latin typeface="Source Serif 4 Bold" pitchFamily="34" charset="0"/>
+                <a:ea typeface="Source Serif 4 Bold" pitchFamily="34" charset="-122"/>
+                <a:cs typeface="Source Serif 4 Bold" pitchFamily="34" charset="-120"/>
+              </a:rPr>
+              <a:t>۲،۲)</a:t>
             </a:r>
             <a:endParaRPr lang="fa-IR" sz="1100" dirty="0"/>
           </a:p>
@@ -2819,7 +3578,7 @@
           <a:blip r:embed="rId3">
             <a:extLst>
               <a:ext uri="{96DAC541-7B7A-43D3-8B79-37D633B846F1}">
-                <asvg:svgBlip xmlns:asvg="http://schemas.microsoft.com/office/drawing/2016/SVG/main" xmlns="" r:embed="rId8"/>
+                <asvg:svgBlip xmlns:asvg="http://schemas.microsoft.com/office/drawing/2016/SVG/main" xmlns="" r:embed="rId4"/>
               </a:ext>
             </a:extLst>
           </a:blip>
@@ -2865,17 +3624,40 @@
               <a:buNone/>
             </a:pPr>
             <a:r>
-              <a:rPr lang="fa-IR" altLang="en-US" sz="1350" dirty="0">
-                <a:solidFill>
-                  <a:srgbClr val="504C49"/>
-                </a:solidFill>
-                <a:latin typeface="Platypi Medium" pitchFamily="34" charset="0"/>
-                <a:ea typeface="Platypi Medium" pitchFamily="34" charset="-122"/>
-                <a:cs typeface="Platypi Medium" pitchFamily="34" charset="-120"/>
-              </a:rPr>
-              <a:t>زمان تا خرابی و صبر مشتری</a:t>
-            </a:r>
-            <a:endParaRPr lang="fa-IR" sz="1350" dirty="0"/>
+              <a:rPr lang="fa-IR" sz="1350" dirty="0" smtClean="0">
+                <a:latin typeface="Platypi Medium" panose="020B0604020202020204" charset="0"/>
+              </a:rPr>
+              <a:t>خرابی ماشین و زمان</a:t>
+            </a:r>
+            <a:r>
+              <a:rPr lang="en-US" sz="1350" dirty="0">
+                <a:latin typeface="Platypi Medium" panose="020B0604020202020204" charset="0"/>
+                <a:cs typeface="Platypi Medium" panose="020B0604020202020204" charset="0"/>
+              </a:rPr>
+              <a:t> </a:t>
+            </a:r>
+            <a:r>
+              <a:rPr lang="fa-IR" sz="1350" b="1" dirty="0">
+                <a:latin typeface="Platypi Medium" panose="020B0604020202020204" charset="0"/>
+              </a:rPr>
+              <a:t> </a:t>
+            </a:r>
+            <a:r>
+              <a:rPr lang="en-US" sz="1350" dirty="0" smtClean="0">
+                <a:latin typeface="Platypi Medium" panose="020B0604020202020204" charset="0"/>
+                <a:cs typeface="Platypi Medium" panose="020B0604020202020204" charset="0"/>
+              </a:rPr>
+              <a:t>Time-Out</a:t>
+            </a:r>
+            <a:r>
+              <a:rPr lang="fa-IR" sz="1350" dirty="0" smtClean="0">
+                <a:latin typeface="Platypi Medium" panose="020B0604020202020204" charset="0"/>
+              </a:rPr>
+              <a:t>: </a:t>
+            </a:r>
+            <a:endParaRPr lang="fa-IR" sz="1350" dirty="0">
+              <a:latin typeface="Platypi Medium" panose="020B0604020202020204" charset="0"/>
+            </a:endParaRPr>
           </a:p>
         </p:txBody>
       </p:sp>
@@ -2907,7 +3689,7 @@
               <a:buNone/>
             </a:pPr>
             <a:r>
-              <a:rPr lang="fa-IR" altLang="en-US" sz="1100" b="1" dirty="0">
+              <a:rPr lang="fa-IR" altLang="en-US" sz="1100" b="1" dirty="0" smtClean="0">
                 <a:solidFill>
                   <a:srgbClr val="504C49"/>
                 </a:solidFill>
@@ -2915,18 +3697,29 @@
                 <a:ea typeface="Source Serif 4 Bold" pitchFamily="34" charset="-122"/>
                 <a:cs typeface="Source Serif 4 Bold" pitchFamily="34" charset="-120"/>
               </a:rPr>
-              <a:t>نمایی</a:t>
-            </a:r>
-            <a:r>
-              <a:rPr lang="fa-IR" altLang="en-US" sz="1100" dirty="0">
-                <a:solidFill>
-                  <a:srgbClr val="504C49"/>
-                </a:solidFill>
-                <a:latin typeface="Source Serif 4" pitchFamily="34" charset="0"/>
-                <a:ea typeface="Source Serif 4" pitchFamily="34" charset="-122"/>
-                <a:cs typeface="Source Serif 4" pitchFamily="34" charset="-120"/>
-              </a:rPr>
-              <a:t> — نرخ ثابت خرابی و ترک تصادفی صف توسط مشتریان</a:t>
+              <a:t>نمایی (</a:t>
+            </a:r>
+            <a:r>
+              <a:rPr lang="en-US" altLang="en-US" sz="1100" b="1" dirty="0" smtClean="0">
+                <a:solidFill>
+                  <a:srgbClr val="504C49"/>
+                </a:solidFill>
+                <a:latin typeface="Source Serif 4 Bold" pitchFamily="34" charset="0"/>
+                <a:ea typeface="Source Serif 4 Bold" pitchFamily="34" charset="-122"/>
+                <a:cs typeface="Source Serif 4 Bold" pitchFamily="34" charset="-120"/>
+              </a:rPr>
+              <a:t>Exponential</a:t>
+            </a:r>
+            <a:r>
+              <a:rPr lang="fa-IR" altLang="en-US" sz="1100" b="1" dirty="0" smtClean="0">
+                <a:solidFill>
+                  <a:srgbClr val="504C49"/>
+                </a:solidFill>
+                <a:latin typeface="Source Serif 4 Bold" pitchFamily="34" charset="0"/>
+                <a:ea typeface="Source Serif 4 Bold" pitchFamily="34" charset="-122"/>
+                <a:cs typeface="Source Serif 4 Bold" pitchFamily="34" charset="-120"/>
+              </a:rPr>
+              <a:t>)</a:t>
             </a:r>
             <a:endParaRPr lang="fa-IR" sz="1100" dirty="0"/>
           </a:p>
@@ -2940,7 +3733,7 @@
 </p:sld>
 </file>
 
-<file path=ppt/slides/slide5.xml><?xml version="1.0" encoding="utf-8"?>
+<file path=ppt/slides/slide6.xml><?xml version="1.0" encoding="utf-8"?>
 <p:sld xmlns:a="http://schemas.openxmlformats.org/drawingml/2006/main" xmlns:r="http://schemas.openxmlformats.org/officeDocument/2006/relationships" xmlns:p="http://schemas.openxmlformats.org/presentationml/2006/main">
   <p:cSld name="Slide 5">
     <p:spTree>
@@ -3894,7 +4687,7 @@
               <a:buNone/>
             </a:pPr>
             <a:r>
-              <a:rPr lang="fa-IR" altLang="en-US" sz="1100" dirty="0">
+              <a:rPr lang="fa-IR" altLang="en-US" sz="1050" dirty="0" smtClean="0">
                 <a:solidFill>
                   <a:srgbClr val="504C49"/>
                 </a:solidFill>
@@ -3902,41 +4695,10 @@
                 <a:ea typeface="Source Serif 4" pitchFamily="34" charset="-122"/>
                 <a:cs typeface="Source Serif 4" pitchFamily="34" charset="-120"/>
               </a:rPr>
-              <a:t>اولویت (Policy)</a:t>
-            </a:r>
-            <a:endParaRPr lang="fa-IR" sz="1100" dirty="0"/>
-          </a:p>
-        </p:txBody>
-      </p:sp>
-      <p:sp>
-        <p:nvSpPr>
-          <p:cNvPr id="30" name="Text 28"/>
-          <p:cNvSpPr/>
-          <p:nvPr/>
-        </p:nvSpPr>
-        <p:spPr>
-          <a:xfrm>
-            <a:off x="1976884" y="3027164"/>
-            <a:ext cx="1639267" cy="226814"/>
-          </a:xfrm>
-          <a:prstGeom prst="rect">
-            <a:avLst/>
-          </a:prstGeom>
-          <a:noFill/>
-          <a:ln/>
-        </p:spPr>
-        <p:txBody>
-          <a:bodyPr wrap="none" lIns="0" tIns="0" rIns="0" bIns="0" rtlCol="0" anchor="t"/>
-          <a:lstStyle/>
-          <a:p>
-            <a:pPr marL="0" indent="0" algn="r" rtl="1">
-              <a:lnSpc>
-                <a:spcPct val="133000"/>
-              </a:lnSpc>
-              <a:buNone/>
-            </a:pPr>
-            <a:r>
-              <a:rPr lang="ar-SA" altLang="en-US" sz="1100" dirty="0">
+              <a:t>اولویت بندی (</a:t>
+            </a:r>
+            <a:r>
+              <a:rPr lang="en-US" altLang="en-US" sz="1050" dirty="0" smtClean="0">
                 <a:solidFill>
                   <a:srgbClr val="504C49"/>
                 </a:solidFill>
@@ -3944,41 +4706,10 @@
                 <a:ea typeface="Source Serif 4" pitchFamily="34" charset="-122"/>
                 <a:cs typeface="Source Serif 4" pitchFamily="34" charset="-120"/>
               </a:rPr>
-              <a:t>۱۰</a:t>
-            </a:r>
-            <a:endParaRPr lang="ar-SA" sz="1100" dirty="0"/>
-          </a:p>
-        </p:txBody>
-      </p:sp>
-      <p:sp>
-        <p:nvSpPr>
-          <p:cNvPr id="31" name="Text 29"/>
-          <p:cNvSpPr/>
-          <p:nvPr/>
-        </p:nvSpPr>
-        <p:spPr>
-          <a:xfrm>
-            <a:off x="3442469" y="3027164"/>
-            <a:ext cx="1313557" cy="226814"/>
-          </a:xfrm>
-          <a:prstGeom prst="rect">
-            <a:avLst/>
-          </a:prstGeom>
-          <a:noFill/>
-          <a:ln/>
-        </p:spPr>
-        <p:txBody>
-          <a:bodyPr wrap="none" lIns="0" tIns="0" rIns="0" bIns="0" rtlCol="0" anchor="t"/>
-          <a:lstStyle/>
-          <a:p>
-            <a:pPr marL="0" indent="0" algn="r" rtl="1">
-              <a:lnSpc>
-                <a:spcPct val="133000"/>
-              </a:lnSpc>
-              <a:buNone/>
-            </a:pPr>
-            <a:r>
-              <a:rPr lang="ar-SA" altLang="en-US" sz="1100" dirty="0">
+              <a:t>Priority </a:t>
+            </a:r>
+            <a:r>
+              <a:rPr lang="fa-IR" altLang="en-US" sz="1050" dirty="0" smtClean="0">
                 <a:solidFill>
                   <a:srgbClr val="504C49"/>
                 </a:solidFill>
@@ -3986,41 +4717,10 @@
                 <a:ea typeface="Source Serif 4" pitchFamily="34" charset="-122"/>
                 <a:cs typeface="Source Serif 4" pitchFamily="34" charset="-120"/>
               </a:rPr>
-              <a:t>۸</a:t>
-            </a:r>
-            <a:endParaRPr lang="ar-SA" sz="1100" dirty="0"/>
-          </a:p>
-        </p:txBody>
-      </p:sp>
-      <p:sp>
-        <p:nvSpPr>
-          <p:cNvPr id="32" name="Text 30"/>
-          <p:cNvSpPr/>
-          <p:nvPr/>
-        </p:nvSpPr>
-        <p:spPr>
-          <a:xfrm>
-            <a:off x="4582344" y="3027164"/>
-            <a:ext cx="1964903" cy="226814"/>
-          </a:xfrm>
-          <a:prstGeom prst="rect">
-            <a:avLst/>
-          </a:prstGeom>
-          <a:noFill/>
-          <a:ln/>
-        </p:spPr>
-        <p:txBody>
-          <a:bodyPr wrap="none" lIns="0" tIns="0" rIns="0" bIns="0" rtlCol="0" anchor="t"/>
-          <a:lstStyle/>
-          <a:p>
-            <a:pPr marL="0" indent="0" algn="r" rtl="1">
-              <a:lnSpc>
-                <a:spcPct val="133000"/>
-              </a:lnSpc>
-              <a:buNone/>
-            </a:pPr>
-            <a:r>
-              <a:rPr lang="fa-IR" altLang="en-US" sz="1100" dirty="0">
+              <a:t>Policy</a:t>
+            </a:r>
+            <a:r>
+              <a:rPr lang="fa-IR" altLang="en-US" sz="1050" dirty="0">
                 <a:solidFill>
                   <a:srgbClr val="504C49"/>
                 </a:solidFill>
@@ -4028,22 +4728,22 @@
                 <a:ea typeface="Source Serif 4" pitchFamily="34" charset="-122"/>
                 <a:cs typeface="Source Serif 4" pitchFamily="34" charset="-120"/>
               </a:rPr>
-              <a:t>اولویت‌بندی</a:t>
-            </a:r>
-            <a:endParaRPr lang="fa-IR" sz="1100" dirty="0"/>
-          </a:p>
-        </p:txBody>
-      </p:sp>
-      <p:sp>
-        <p:nvSpPr>
-          <p:cNvPr id="33" name="Text 31"/>
-          <p:cNvSpPr/>
-          <p:nvPr/>
-        </p:nvSpPr>
-        <p:spPr>
-          <a:xfrm>
-            <a:off x="6373564" y="3027164"/>
-            <a:ext cx="2127796" cy="226814"/>
+              <a:t>)</a:t>
+            </a:r>
+            <a:endParaRPr lang="fa-IR" sz="1050" dirty="0"/>
+          </a:p>
+        </p:txBody>
+      </p:sp>
+      <p:sp>
+        <p:nvSpPr>
+          <p:cNvPr id="30" name="Text 28"/>
+          <p:cNvSpPr/>
+          <p:nvPr/>
+        </p:nvSpPr>
+        <p:spPr>
+          <a:xfrm>
+            <a:off x="1976884" y="3027164"/>
+            <a:ext cx="1639267" cy="226814"/>
           </a:xfrm>
           <a:prstGeom prst="rect">
             <a:avLst/>
@@ -4070,7 +4770,7 @@
                 <a:ea typeface="Source Serif 4" pitchFamily="34" charset="-122"/>
                 <a:cs typeface="Source Serif 4" pitchFamily="34" charset="-120"/>
               </a:rPr>
-              <a:t>۰.۴۵</a:t>
+              <a:t>۱۰</a:t>
             </a:r>
             <a:endParaRPr lang="ar-SA" sz="1100" dirty="0"/>
           </a:p>
@@ -4078,14 +4778,14 @@
       </p:sp>
       <p:sp>
         <p:nvSpPr>
-          <p:cNvPr id="34" name="Text 32"/>
-          <p:cNvSpPr/>
-          <p:nvPr/>
-        </p:nvSpPr>
-        <p:spPr>
-          <a:xfrm>
-            <a:off x="185663" y="3438376"/>
-            <a:ext cx="1964903" cy="226814"/>
+          <p:cNvPr id="31" name="Text 29"/>
+          <p:cNvSpPr/>
+          <p:nvPr/>
+        </p:nvSpPr>
+        <p:spPr>
+          <a:xfrm>
+            <a:off x="3442469" y="3027164"/>
+            <a:ext cx="1313557" cy="226814"/>
           </a:xfrm>
           <a:prstGeom prst="rect">
             <a:avLst/>
@@ -4104,7 +4804,7 @@
               <a:buNone/>
             </a:pPr>
             <a:r>
-              <a:rPr lang="fa-IR" altLang="en-US" sz="1100" dirty="0">
+              <a:rPr lang="ar-SA" altLang="en-US" sz="1100" dirty="0">
                 <a:solidFill>
                   <a:srgbClr val="504C49"/>
                 </a:solidFill>
@@ -4112,22 +4812,22 @@
                 <a:ea typeface="Source Serif 4" pitchFamily="34" charset="-122"/>
                 <a:cs typeface="Source Serif 4" pitchFamily="34" charset="-120"/>
               </a:rPr>
-              <a:t>افزایش تقاضا</a:t>
-            </a:r>
-            <a:endParaRPr lang="fa-IR" sz="1100" dirty="0"/>
-          </a:p>
-        </p:txBody>
-      </p:sp>
-      <p:sp>
-        <p:nvSpPr>
-          <p:cNvPr id="35" name="Text 33"/>
-          <p:cNvSpPr/>
-          <p:nvPr/>
-        </p:nvSpPr>
-        <p:spPr>
-          <a:xfrm>
-            <a:off x="1976884" y="3438376"/>
-            <a:ext cx="1639267" cy="226814"/>
+              <a:t>۸</a:t>
+            </a:r>
+            <a:endParaRPr lang="ar-SA" sz="1100" dirty="0"/>
+          </a:p>
+        </p:txBody>
+      </p:sp>
+      <p:sp>
+        <p:nvSpPr>
+          <p:cNvPr id="32" name="Text 30"/>
+          <p:cNvSpPr/>
+          <p:nvPr/>
+        </p:nvSpPr>
+        <p:spPr>
+          <a:xfrm>
+            <a:off x="4582344" y="3027164"/>
+            <a:ext cx="1964903" cy="226814"/>
           </a:xfrm>
           <a:prstGeom prst="rect">
             <a:avLst/>
@@ -4146,7 +4846,7 @@
               <a:buNone/>
             </a:pPr>
             <a:r>
-              <a:rPr lang="ar-SA" altLang="en-US" sz="1100" dirty="0">
+              <a:rPr lang="fa-IR" altLang="en-US" sz="1100" dirty="0" smtClean="0">
                 <a:solidFill>
                   <a:srgbClr val="504C49"/>
                 </a:solidFill>
@@ -4154,22 +4854,22 @@
                 <a:ea typeface="Source Serif 4" pitchFamily="34" charset="-122"/>
                 <a:cs typeface="Source Serif 4" pitchFamily="34" charset="-120"/>
               </a:rPr>
-              <a:t>۱۰</a:t>
-            </a:r>
-            <a:endParaRPr lang="ar-SA" sz="1100" dirty="0"/>
-          </a:p>
-        </p:txBody>
-      </p:sp>
-      <p:sp>
-        <p:nvSpPr>
-          <p:cNvPr id="36" name="Text 34"/>
-          <p:cNvSpPr/>
-          <p:nvPr/>
-        </p:nvSpPr>
-        <p:spPr>
-          <a:xfrm>
-            <a:off x="3442469" y="3438376"/>
-            <a:ext cx="1313557" cy="226814"/>
+              <a:t>صف اولویت‌</a:t>
+            </a:r>
+            <a:endParaRPr lang="fa-IR" sz="1100" dirty="0"/>
+          </a:p>
+        </p:txBody>
+      </p:sp>
+      <p:sp>
+        <p:nvSpPr>
+          <p:cNvPr id="33" name="Text 31"/>
+          <p:cNvSpPr/>
+          <p:nvPr/>
+        </p:nvSpPr>
+        <p:spPr>
+          <a:xfrm>
+            <a:off x="6373564" y="3027164"/>
+            <a:ext cx="2127796" cy="226814"/>
           </a:xfrm>
           <a:prstGeom prst="rect">
             <a:avLst/>
@@ -4196,7 +4896,7 @@
                 <a:ea typeface="Source Serif 4" pitchFamily="34" charset="-122"/>
                 <a:cs typeface="Source Serif 4" pitchFamily="34" charset="-120"/>
               </a:rPr>
-              <a:t>۸</a:t>
+              <a:t>۰.۴۵</a:t>
             </a:r>
             <a:endParaRPr lang="ar-SA" sz="1100" dirty="0"/>
           </a:p>
@@ -4204,13 +4904,13 @@
       </p:sp>
       <p:sp>
         <p:nvSpPr>
-          <p:cNvPr id="37" name="Text 35"/>
-          <p:cNvSpPr/>
-          <p:nvPr/>
-        </p:nvSpPr>
-        <p:spPr>
-          <a:xfrm>
-            <a:off x="4582344" y="3438376"/>
+          <p:cNvPr id="34" name="Text 32"/>
+          <p:cNvSpPr/>
+          <p:nvPr/>
+        </p:nvSpPr>
+        <p:spPr>
+          <a:xfrm>
+            <a:off x="185663" y="3438376"/>
             <a:ext cx="1964903" cy="226814"/>
           </a:xfrm>
           <a:prstGeom prst="rect">
@@ -4223,14 +4923,14 @@
           <a:bodyPr wrap="none" lIns="0" tIns="0" rIns="0" bIns="0" rtlCol="0" anchor="t"/>
           <a:lstStyle/>
           <a:p>
-            <a:pPr marL="0" indent="0" algn="r">
+            <a:pPr marL="0" indent="0" algn="r" rtl="1">
               <a:lnSpc>
                 <a:spcPct val="133000"/>
               </a:lnSpc>
               <a:buNone/>
             </a:pPr>
             <a:r>
-              <a:rPr lang="en-US" sz="1100" dirty="0">
+              <a:rPr lang="fa-IR" altLang="en-US" sz="1100" dirty="0">
                 <a:solidFill>
                   <a:srgbClr val="504C49"/>
                 </a:solidFill>
@@ -4238,22 +4938,22 @@
                 <a:ea typeface="Source Serif 4" pitchFamily="34" charset="-122"/>
                 <a:cs typeface="Source Serif 4" pitchFamily="34" charset="-120"/>
               </a:rPr>
-              <a:t>FIFO</a:t>
-            </a:r>
-            <a:endParaRPr lang="en-US" sz="1100" dirty="0"/>
-          </a:p>
-        </p:txBody>
-      </p:sp>
-      <p:sp>
-        <p:nvSpPr>
-          <p:cNvPr id="38" name="Text 36"/>
-          <p:cNvSpPr/>
-          <p:nvPr/>
-        </p:nvSpPr>
-        <p:spPr>
-          <a:xfrm>
-            <a:off x="6373564" y="3438376"/>
-            <a:ext cx="2127796" cy="226814"/>
+              <a:t>افزایش تقاضا</a:t>
+            </a:r>
+            <a:endParaRPr lang="fa-IR" sz="1100" dirty="0"/>
+          </a:p>
+        </p:txBody>
+      </p:sp>
+      <p:sp>
+        <p:nvSpPr>
+          <p:cNvPr id="35" name="Text 33"/>
+          <p:cNvSpPr/>
+          <p:nvPr/>
+        </p:nvSpPr>
+        <p:spPr>
+          <a:xfrm>
+            <a:off x="1976884" y="3438376"/>
+            <a:ext cx="1639267" cy="226814"/>
           </a:xfrm>
           <a:prstGeom prst="rect">
             <a:avLst/>
@@ -4280,7 +4980,7 @@
                 <a:ea typeface="Source Serif 4" pitchFamily="34" charset="-122"/>
                 <a:cs typeface="Source Serif 4" pitchFamily="34" charset="-120"/>
               </a:rPr>
-              <a:t>۰.۳۵</a:t>
+              <a:t>۱۰</a:t>
             </a:r>
             <a:endParaRPr lang="ar-SA" sz="1100" dirty="0"/>
           </a:p>
@@ -4288,14 +4988,14 @@
       </p:sp>
       <p:sp>
         <p:nvSpPr>
-          <p:cNvPr id="39" name="Text 37"/>
-          <p:cNvSpPr/>
-          <p:nvPr/>
-        </p:nvSpPr>
-        <p:spPr>
-          <a:xfrm>
-            <a:off x="185663" y="3849588"/>
-            <a:ext cx="1964903" cy="226814"/>
+          <p:cNvPr id="36" name="Text 34"/>
+          <p:cNvSpPr/>
+          <p:nvPr/>
+        </p:nvSpPr>
+        <p:spPr>
+          <a:xfrm>
+            <a:off x="3442469" y="3438376"/>
+            <a:ext cx="1313557" cy="226814"/>
           </a:xfrm>
           <a:prstGeom prst="rect">
             <a:avLst/>
@@ -4314,7 +5014,7 @@
               <a:buNone/>
             </a:pPr>
             <a:r>
-              <a:rPr lang="fa-IR" altLang="en-US" sz="1100" dirty="0">
+              <a:rPr lang="ar-SA" altLang="en-US" sz="1100" dirty="0">
                 <a:solidFill>
                   <a:srgbClr val="504C49"/>
                 </a:solidFill>
@@ -4322,22 +5022,22 @@
                 <a:ea typeface="Source Serif 4" pitchFamily="34" charset="-122"/>
                 <a:cs typeface="Source Serif 4" pitchFamily="34" charset="-120"/>
               </a:rPr>
-              <a:t>اولویت + تقاضا</a:t>
-            </a:r>
-            <a:endParaRPr lang="fa-IR" sz="1100" dirty="0"/>
-          </a:p>
-        </p:txBody>
-      </p:sp>
-      <p:sp>
-        <p:nvSpPr>
-          <p:cNvPr id="40" name="Text 38"/>
-          <p:cNvSpPr/>
-          <p:nvPr/>
-        </p:nvSpPr>
-        <p:spPr>
-          <a:xfrm>
-            <a:off x="1976884" y="3849588"/>
-            <a:ext cx="1639267" cy="226814"/>
+              <a:t>۸</a:t>
+            </a:r>
+            <a:endParaRPr lang="ar-SA" sz="1100" dirty="0"/>
+          </a:p>
+        </p:txBody>
+      </p:sp>
+      <p:sp>
+        <p:nvSpPr>
+          <p:cNvPr id="37" name="Text 35"/>
+          <p:cNvSpPr/>
+          <p:nvPr/>
+        </p:nvSpPr>
+        <p:spPr>
+          <a:xfrm>
+            <a:off x="4582344" y="3438376"/>
+            <a:ext cx="1964903" cy="226814"/>
           </a:xfrm>
           <a:prstGeom prst="rect">
             <a:avLst/>
@@ -4349,14 +5049,14 @@
           <a:bodyPr wrap="none" lIns="0" tIns="0" rIns="0" bIns="0" rtlCol="0" anchor="t"/>
           <a:lstStyle/>
           <a:p>
-            <a:pPr marL="0" indent="0" algn="r" rtl="1">
+            <a:pPr marL="0" indent="0" algn="r">
               <a:lnSpc>
                 <a:spcPct val="133000"/>
               </a:lnSpc>
               <a:buNone/>
             </a:pPr>
             <a:r>
-              <a:rPr lang="ar-SA" altLang="en-US" sz="1100" dirty="0">
+              <a:rPr lang="en-US" sz="1100" dirty="0">
                 <a:solidFill>
                   <a:srgbClr val="504C49"/>
                 </a:solidFill>
@@ -4364,22 +5064,22 @@
                 <a:ea typeface="Source Serif 4" pitchFamily="34" charset="-122"/>
                 <a:cs typeface="Source Serif 4" pitchFamily="34" charset="-120"/>
               </a:rPr>
-              <a:t>۱۰</a:t>
-            </a:r>
-            <a:endParaRPr lang="ar-SA" sz="1100" dirty="0"/>
-          </a:p>
-        </p:txBody>
-      </p:sp>
-      <p:sp>
-        <p:nvSpPr>
-          <p:cNvPr id="41" name="Text 39"/>
-          <p:cNvSpPr/>
-          <p:nvPr/>
-        </p:nvSpPr>
-        <p:spPr>
-          <a:xfrm>
-            <a:off x="3442469" y="3849588"/>
-            <a:ext cx="1313557" cy="226814"/>
+              <a:t>FIFO</a:t>
+            </a:r>
+            <a:endParaRPr lang="en-US" sz="1100" dirty="0"/>
+          </a:p>
+        </p:txBody>
+      </p:sp>
+      <p:sp>
+        <p:nvSpPr>
+          <p:cNvPr id="38" name="Text 36"/>
+          <p:cNvSpPr/>
+          <p:nvPr/>
+        </p:nvSpPr>
+        <p:spPr>
+          <a:xfrm>
+            <a:off x="6373564" y="3438376"/>
+            <a:ext cx="2127796" cy="226814"/>
           </a:xfrm>
           <a:prstGeom prst="rect">
             <a:avLst/>
@@ -4406,7 +5106,7 @@
                 <a:ea typeface="Source Serif 4" pitchFamily="34" charset="-122"/>
                 <a:cs typeface="Source Serif 4" pitchFamily="34" charset="-120"/>
               </a:rPr>
-              <a:t>۸</a:t>
+              <a:t>۰.۳۵</a:t>
             </a:r>
             <a:endParaRPr lang="ar-SA" sz="1100" dirty="0"/>
           </a:p>
@@ -4414,13 +5114,13 @@
       </p:sp>
       <p:sp>
         <p:nvSpPr>
-          <p:cNvPr id="42" name="Text 40"/>
-          <p:cNvSpPr/>
-          <p:nvPr/>
-        </p:nvSpPr>
-        <p:spPr>
-          <a:xfrm>
-            <a:off x="4582344" y="3849588"/>
+          <p:cNvPr id="39" name="Text 37"/>
+          <p:cNvSpPr/>
+          <p:nvPr/>
+        </p:nvSpPr>
+        <p:spPr>
+          <a:xfrm>
+            <a:off x="185663" y="3849588"/>
             <a:ext cx="1964903" cy="226814"/>
           </a:xfrm>
           <a:prstGeom prst="rect">
@@ -4440,7 +5140,7 @@
               <a:buNone/>
             </a:pPr>
             <a:r>
-              <a:rPr lang="fa-IR" altLang="en-US" sz="1100" dirty="0">
+              <a:rPr lang="fa-IR" altLang="en-US" sz="1100" dirty="0" smtClean="0">
                 <a:solidFill>
                   <a:srgbClr val="504C49"/>
                 </a:solidFill>
@@ -4448,7 +5148,144 @@
                 <a:ea typeface="Source Serif 4" pitchFamily="34" charset="-122"/>
                 <a:cs typeface="Source Serif 4" pitchFamily="34" charset="-120"/>
               </a:rPr>
-              <a:t>اولویت‌بندی</a:t>
+              <a:t>اولویت بندی </a:t>
+            </a:r>
+            <a:r>
+              <a:rPr lang="fa-IR" altLang="en-US" sz="1100" dirty="0">
+                <a:solidFill>
+                  <a:srgbClr val="504C49"/>
+                </a:solidFill>
+                <a:latin typeface="Source Serif 4" pitchFamily="34" charset="0"/>
+                <a:ea typeface="Source Serif 4" pitchFamily="34" charset="-122"/>
+                <a:cs typeface="Source Serif 4" pitchFamily="34" charset="-120"/>
+              </a:rPr>
+              <a:t>+ تقاضا</a:t>
+            </a:r>
+            <a:endParaRPr lang="fa-IR" sz="1100" dirty="0"/>
+          </a:p>
+        </p:txBody>
+      </p:sp>
+      <p:sp>
+        <p:nvSpPr>
+          <p:cNvPr id="40" name="Text 38"/>
+          <p:cNvSpPr/>
+          <p:nvPr/>
+        </p:nvSpPr>
+        <p:spPr>
+          <a:xfrm>
+            <a:off x="1976884" y="3849588"/>
+            <a:ext cx="1639267" cy="226814"/>
+          </a:xfrm>
+          <a:prstGeom prst="rect">
+            <a:avLst/>
+          </a:prstGeom>
+          <a:noFill/>
+          <a:ln/>
+        </p:spPr>
+        <p:txBody>
+          <a:bodyPr wrap="none" lIns="0" tIns="0" rIns="0" bIns="0" rtlCol="0" anchor="t"/>
+          <a:lstStyle/>
+          <a:p>
+            <a:pPr marL="0" indent="0" algn="r" rtl="1">
+              <a:lnSpc>
+                <a:spcPct val="133000"/>
+              </a:lnSpc>
+              <a:buNone/>
+            </a:pPr>
+            <a:r>
+              <a:rPr lang="ar-SA" altLang="en-US" sz="1100" dirty="0">
+                <a:solidFill>
+                  <a:srgbClr val="504C49"/>
+                </a:solidFill>
+                <a:latin typeface="Source Serif 4" pitchFamily="34" charset="0"/>
+                <a:ea typeface="Source Serif 4" pitchFamily="34" charset="-122"/>
+                <a:cs typeface="Source Serif 4" pitchFamily="34" charset="-120"/>
+              </a:rPr>
+              <a:t>۱۰</a:t>
+            </a:r>
+            <a:endParaRPr lang="ar-SA" sz="1100" dirty="0"/>
+          </a:p>
+        </p:txBody>
+      </p:sp>
+      <p:sp>
+        <p:nvSpPr>
+          <p:cNvPr id="41" name="Text 39"/>
+          <p:cNvSpPr/>
+          <p:nvPr/>
+        </p:nvSpPr>
+        <p:spPr>
+          <a:xfrm>
+            <a:off x="3442469" y="3849588"/>
+            <a:ext cx="1313557" cy="226814"/>
+          </a:xfrm>
+          <a:prstGeom prst="rect">
+            <a:avLst/>
+          </a:prstGeom>
+          <a:noFill/>
+          <a:ln/>
+        </p:spPr>
+        <p:txBody>
+          <a:bodyPr wrap="none" lIns="0" tIns="0" rIns="0" bIns="0" rtlCol="0" anchor="t"/>
+          <a:lstStyle/>
+          <a:p>
+            <a:pPr marL="0" indent="0" algn="r" rtl="1">
+              <a:lnSpc>
+                <a:spcPct val="133000"/>
+              </a:lnSpc>
+              <a:buNone/>
+            </a:pPr>
+            <a:r>
+              <a:rPr lang="ar-SA" altLang="en-US" sz="1100" dirty="0">
+                <a:solidFill>
+                  <a:srgbClr val="504C49"/>
+                </a:solidFill>
+                <a:latin typeface="Source Serif 4" pitchFamily="34" charset="0"/>
+                <a:ea typeface="Source Serif 4" pitchFamily="34" charset="-122"/>
+                <a:cs typeface="Source Serif 4" pitchFamily="34" charset="-120"/>
+              </a:rPr>
+              <a:t>۸</a:t>
+            </a:r>
+            <a:endParaRPr lang="ar-SA" sz="1100" dirty="0"/>
+          </a:p>
+        </p:txBody>
+      </p:sp>
+      <p:sp>
+        <p:nvSpPr>
+          <p:cNvPr id="42" name="Text 40"/>
+          <p:cNvSpPr/>
+          <p:nvPr/>
+        </p:nvSpPr>
+        <p:spPr>
+          <a:xfrm>
+            <a:off x="4582344" y="3849588"/>
+            <a:ext cx="1964903" cy="226814"/>
+          </a:xfrm>
+          <a:prstGeom prst="rect">
+            <a:avLst/>
+          </a:prstGeom>
+          <a:noFill/>
+          <a:ln/>
+        </p:spPr>
+        <p:txBody>
+          <a:bodyPr wrap="none" lIns="0" tIns="0" rIns="0" bIns="0" rtlCol="0" anchor="t"/>
+          <a:lstStyle/>
+          <a:p>
+            <a:pPr marL="0" indent="0" algn="r" rtl="1">
+              <a:lnSpc>
+                <a:spcPct val="133000"/>
+              </a:lnSpc>
+              <a:buNone/>
+            </a:pPr>
+            <a:r>
+              <a:rPr lang="fa-IR" altLang="en-US" sz="1100" dirty="0" smtClean="0">
+                <a:solidFill>
+                  <a:srgbClr val="504C49"/>
+                </a:solidFill>
+                <a:latin typeface="Source Serif 4" pitchFamily="34" charset="0"/>
+                <a:ea typeface="Source Serif 4" pitchFamily="34" charset="-122"/>
+                <a:cs typeface="Source Serif 4" pitchFamily="34" charset="-120"/>
+              </a:rPr>
+              <a:t>صف اولویت</a:t>
             </a:r>
             <a:endParaRPr lang="fa-IR" sz="1100" dirty="0"/>
           </a:p>
@@ -4504,7 +5341,7 @@
 </p:sld>
 </file>
 
-<file path=ppt/slides/slide6.xml><?xml version="1.0" encoding="utf-8"?>
+<file path=ppt/slides/slide7.xml><?xml version="1.0" encoding="utf-8"?>
 <p:sld xmlns:a="http://schemas.openxmlformats.org/drawingml/2006/main" xmlns:r="http://schemas.openxmlformats.org/officeDocument/2006/relationships" xmlns:p="http://schemas.openxmlformats.org/presentationml/2006/main">
   <p:cSld name="Slide 6">
     <p:spTree>
@@ -4613,7 +5450,7 @@
 </p:sld>
 </file>
 
-<file path=ppt/slides/slide7.xml><?xml version="1.0" encoding="utf-8"?>
+<file path=ppt/slides/slide8.xml><?xml version="1.0" encoding="utf-8"?>
 <p:sld xmlns:a="http://schemas.openxmlformats.org/drawingml/2006/main" xmlns:r="http://schemas.openxmlformats.org/officeDocument/2006/relationships" xmlns:p="http://schemas.openxmlformats.org/presentationml/2006/main">
   <p:cSld name="Slide 7">
     <p:spTree>
@@ -5070,7 +5907,7 @@
 </p:sld>
 </file>
 
-<file path=ppt/slides/slide8.xml><?xml version="1.0" encoding="utf-8"?>
+<file path=ppt/slides/slide9.xml><?xml version="1.0" encoding="utf-8"?>
 <p:sld xmlns:a="http://schemas.openxmlformats.org/drawingml/2006/main" xmlns:r="http://schemas.openxmlformats.org/officeDocument/2006/relationships" xmlns:p="http://schemas.openxmlformats.org/presentationml/2006/main">
   <p:cSld name="Slide 8">
     <p:spTree>
@@ -5321,137 +6158,6 @@
                 <a:cs typeface="Source Serif 4" pitchFamily="34" charset="-120"/>
               </a:rPr>
               <a:t>، کارهای حیاتی را نجات می‌ دهد</a:t>
-            </a:r>
-            <a:endParaRPr lang="fa-IR" sz="1100" dirty="0"/>
-          </a:p>
-        </p:txBody>
-      </p:sp>
-    </p:spTree>
-  </p:cSld>
-  <p:clrMapOvr>
-    <a:masterClrMapping/>
-  </p:clrMapOvr>
-</p:sld>
-</file>
-
-<file path=ppt/slides/slide9.xml><?xml version="1.0" encoding="utf-8"?>
-<p:sld xmlns:a="http://schemas.openxmlformats.org/drawingml/2006/main" xmlns:r="http://schemas.openxmlformats.org/officeDocument/2006/relationships" xmlns:p="http://schemas.openxmlformats.org/presentationml/2006/main">
-  <p:cSld name="Slide 9">
-    <p:spTree>
-      <p:nvGrpSpPr>
-        <p:cNvPr id="1" name=""/>
-        <p:cNvGrpSpPr/>
-        <p:nvPr/>
-      </p:nvGrpSpPr>
-      <p:grpSpPr>
-        <a:xfrm>
-          <a:off x="0" y="0"/>
-          <a:ext cx="0" cy="0"/>
-          <a:chOff x="0" y="0"/>
-          <a:chExt cx="0" cy="0"/>
-        </a:xfrm>
-      </p:grpSpPr>
-      <p:sp>
-        <p:nvSpPr>
-          <p:cNvPr id="2" name="Text 0"/>
-          <p:cNvSpPr/>
-          <p:nvPr/>
-        </p:nvSpPr>
-        <p:spPr>
-          <a:xfrm>
-            <a:off x="496119" y="1868239"/>
-            <a:ext cx="8151763" cy="442987"/>
-          </a:xfrm>
-          <a:prstGeom prst="rect">
-            <a:avLst/>
-          </a:prstGeom>
-          <a:noFill/>
-          <a:ln/>
-        </p:spPr>
-        <p:txBody>
-          <a:bodyPr wrap="none" lIns="0" tIns="0" rIns="0" bIns="0" rtlCol="0" anchor="t"/>
-          <a:lstStyle/>
-          <a:p>
-            <a:pPr marL="0" indent="0" algn="r" rtl="1">
-              <a:lnSpc>
-                <a:spcPct val="104000"/>
-              </a:lnSpc>
-              <a:buNone/>
-            </a:pPr>
-            <a:r>
-              <a:rPr lang="fa-IR" altLang="en-US" sz="2750" dirty="0">
-                <a:solidFill>
-                  <a:srgbClr val="201B18"/>
-                </a:solidFill>
-                <a:latin typeface="Platypi Medium" pitchFamily="34" charset="0"/>
-                <a:ea typeface="Platypi Medium" pitchFamily="34" charset="-122"/>
-                <a:cs typeface="Platypi Medium" pitchFamily="34" charset="-120"/>
-              </a:rPr>
-              <a:t>نتیجه‌ گیری نهایی</a:t>
-            </a:r>
-            <a:endParaRPr lang="fa-IR" sz="2750" dirty="0"/>
-          </a:p>
-        </p:txBody>
-      </p:sp>
-      <p:sp>
-        <p:nvSpPr>
-          <p:cNvPr id="3" name="Text 1"/>
-          <p:cNvSpPr/>
-          <p:nvPr/>
-        </p:nvSpPr>
-        <p:spPr>
-          <a:xfrm>
-            <a:off x="496119" y="2594744"/>
-            <a:ext cx="8151763" cy="680442"/>
-          </a:xfrm>
-          <a:prstGeom prst="rect">
-            <a:avLst/>
-          </a:prstGeom>
-          <a:noFill/>
-          <a:ln/>
-        </p:spPr>
-        <p:txBody>
-          <a:bodyPr wrap="square" lIns="0" tIns="0" rIns="0" bIns="0" rtlCol="0" anchor="t">
-            <a:normAutofit/>
-          </a:bodyPr>
-          <a:lstStyle/>
-          <a:p>
-            <a:pPr marL="0" indent="0" algn="r" rtl="1">
-              <a:lnSpc>
-                <a:spcPct val="133000"/>
-              </a:lnSpc>
-              <a:buNone/>
-            </a:pPr>
-            <a:r>
-              <a:rPr lang="fa-IR" altLang="en-US" sz="1100" dirty="0">
-                <a:solidFill>
-                  <a:srgbClr val="504C49"/>
-                </a:solidFill>
-                <a:latin typeface="Source Serif 4" pitchFamily="34" charset="0"/>
-                <a:ea typeface="Source Serif 4" pitchFamily="34" charset="-122"/>
-                <a:cs typeface="Source Serif 4" pitchFamily="34" charset="-120"/>
-              </a:rPr>
-              <a:t>در حالت کلی، سیاست "صف اولویت بندی" بهترین عملکرد را دارد. </a:t>
-            </a:r>
-            <a:endParaRPr lang="fa-IR" sz="1100" dirty="0"/>
-          </a:p>
-          <a:p>
-            <a:pPr marL="0" indent="0" algn="r" rtl="1">
-              <a:lnSpc>
-                <a:spcPct val="133000"/>
-              </a:lnSpc>
-              <a:buNone/>
-            </a:pPr>
-            <a:r>
-              <a:rPr lang="fa-IR" altLang="en-US" sz="1100" dirty="0">
-                <a:solidFill>
-                  <a:srgbClr val="504C49"/>
-                </a:solidFill>
-                <a:latin typeface="Source Serif 4" pitchFamily="34" charset="0"/>
-                <a:ea typeface="Source Serif 4" pitchFamily="34" charset="-122"/>
-                <a:cs typeface="Source Serif 4" pitchFamily="34" charset="-120"/>
-              </a:rPr>
-              <a:t>این سیاست در زمان بار عادی تاثیر منفی بر میانگین زمان انتظار ندارد، اما هنگام افزایش تقاضا، باعث می شود کار های حیاتی در اولویت قرار داده شوند. </a:t>
             </a:r>
             <a:endParaRPr lang="fa-IR" sz="1100" dirty="0"/>
           </a:p>
